--- a/Figures_Sept2026.pptx
+++ b/Figures_Sept2026.pptx
@@ -279,7 +279,7 @@
           <a:p>
             <a:fld id="{2357EEA9-8660-4B76-B0A4-CF8321765BE8}" type="datetimeFigureOut">
               <a:rPr lang="en-AU" smtClean="0"/>
-              <a:t>2/09/2026</a:t>
+              <a:t>3/09/2026</a:t>
             </a:fld>
             <a:endParaRPr lang="en-AU"/>
           </a:p>
@@ -612,6 +612,90 @@
           <a:p>
             <a:fld id="{22838AC1-FBD2-4A26-95D3-E6540FE9ADE6}" type="slidenum">
               <a:rPr lang="en-AU" smtClean="0"/>
+              <a:t>4</a:t>
+            </a:fld>
+            <a:endParaRPr lang="en-AU"/>
+          </a:p>
+        </p:txBody>
+      </p:sp>
+    </p:spTree>
+    <p:extLst>
+      <p:ext uri="{BB962C8B-B14F-4D97-AF65-F5344CB8AC3E}">
+        <p14:creationId xmlns:p14="http://schemas.microsoft.com/office/powerpoint/2010/main" val="498158771"/>
+      </p:ext>
+    </p:extLst>
+  </p:cSld>
+  <p:clrMapOvr>
+    <a:masterClrMapping/>
+  </p:clrMapOvr>
+</p:notes>
+</file>
+
+<file path=ppt/notesSlides/notesSlide2.xml><?xml version="1.0" encoding="utf-8"?>
+<p:notes xmlns:a="http://schemas.openxmlformats.org/drawingml/2006/main" xmlns:r="http://schemas.openxmlformats.org/officeDocument/2006/relationships" xmlns:p="http://schemas.openxmlformats.org/presentationml/2006/main">
+  <p:cSld>
+    <p:spTree>
+      <p:nvGrpSpPr>
+        <p:cNvPr id="1" name=""/>
+        <p:cNvGrpSpPr/>
+        <p:nvPr/>
+      </p:nvGrpSpPr>
+      <p:grpSpPr>
+        <a:xfrm>
+          <a:off x="0" y="0"/>
+          <a:ext cx="0" cy="0"/>
+          <a:chOff x="0" y="0"/>
+          <a:chExt cx="0" cy="0"/>
+        </a:xfrm>
+      </p:grpSpPr>
+      <p:sp>
+        <p:nvSpPr>
+          <p:cNvPr id="2" name="Slide Image Placeholder 1"/>
+          <p:cNvSpPr>
+            <a:spLocks noGrp="1" noRot="1" noChangeAspect="1"/>
+          </p:cNvSpPr>
+          <p:nvPr>
+            <p:ph type="sldImg"/>
+          </p:nvPr>
+        </p:nvSpPr>
+        <p:spPr/>
+      </p:sp>
+      <p:sp>
+        <p:nvSpPr>
+          <p:cNvPr id="3" name="Notes Placeholder 2"/>
+          <p:cNvSpPr>
+            <a:spLocks noGrp="1"/>
+          </p:cNvSpPr>
+          <p:nvPr>
+            <p:ph type="body" idx="1"/>
+          </p:nvPr>
+        </p:nvSpPr>
+        <p:spPr/>
+        <p:txBody>
+          <a:bodyPr/>
+          <a:lstStyle/>
+          <a:p>
+            <a:endParaRPr lang="en-AU" dirty="0"/>
+          </a:p>
+        </p:txBody>
+      </p:sp>
+      <p:sp>
+        <p:nvSpPr>
+          <p:cNvPr id="4" name="Slide Number Placeholder 3"/>
+          <p:cNvSpPr>
+            <a:spLocks noGrp="1"/>
+          </p:cNvSpPr>
+          <p:nvPr>
+            <p:ph type="sldNum" sz="quarter" idx="5"/>
+          </p:nvPr>
+        </p:nvSpPr>
+        <p:spPr/>
+        <p:txBody>
+          <a:bodyPr/>
+          <a:lstStyle/>
+          <a:p>
+            <a:fld id="{22838AC1-FBD2-4A26-95D3-E6540FE9ADE6}" type="slidenum">
+              <a:rPr lang="en-AU" smtClean="0"/>
               <a:t>10</a:t>
             </a:fld>
             <a:endParaRPr lang="en-AU"/>
@@ -631,7 +715,7 @@
 </p:notes>
 </file>
 
-<file path=ppt/notesSlides/notesSlide2.xml><?xml version="1.0" encoding="utf-8"?>
+<file path=ppt/notesSlides/notesSlide3.xml><?xml version="1.0" encoding="utf-8"?>
 <p:notes xmlns:a="http://schemas.openxmlformats.org/drawingml/2006/main" xmlns:r="http://schemas.openxmlformats.org/officeDocument/2006/relationships" xmlns:p="http://schemas.openxmlformats.org/presentationml/2006/main">
   <p:cSld>
     <p:spTree>
@@ -739,7 +823,7 @@
 </p:notes>
 </file>
 
-<file path=ppt/notesSlides/notesSlide3.xml><?xml version="1.0" encoding="utf-8"?>
+<file path=ppt/notesSlides/notesSlide4.xml><?xml version="1.0" encoding="utf-8"?>
 <p:notes xmlns:a="http://schemas.openxmlformats.org/drawingml/2006/main" xmlns:r="http://schemas.openxmlformats.org/officeDocument/2006/relationships" xmlns:p="http://schemas.openxmlformats.org/presentationml/2006/main">
   <p:cSld>
     <p:spTree>
@@ -972,7 +1056,7 @@
           <a:p>
             <a:fld id="{78D59BC5-30E6-4D57-A435-0698DC1D92FA}" type="datetimeFigureOut">
               <a:rPr lang="en-AU" smtClean="0"/>
-              <a:t>2/09/2026</a:t>
+              <a:t>3/09/2026</a:t>
             </a:fld>
             <a:endParaRPr lang="en-AU"/>
           </a:p>
@@ -1172,7 +1256,7 @@
           <a:p>
             <a:fld id="{78D59BC5-30E6-4D57-A435-0698DC1D92FA}" type="datetimeFigureOut">
               <a:rPr lang="en-AU" smtClean="0"/>
-              <a:t>2/09/2026</a:t>
+              <a:t>3/09/2026</a:t>
             </a:fld>
             <a:endParaRPr lang="en-AU"/>
           </a:p>
@@ -1382,7 +1466,7 @@
           <a:p>
             <a:fld id="{78D59BC5-30E6-4D57-A435-0698DC1D92FA}" type="datetimeFigureOut">
               <a:rPr lang="en-AU" smtClean="0"/>
-              <a:t>2/09/2026</a:t>
+              <a:t>3/09/2026</a:t>
             </a:fld>
             <a:endParaRPr lang="en-AU"/>
           </a:p>
@@ -1582,7 +1666,7 @@
           <a:p>
             <a:fld id="{78D59BC5-30E6-4D57-A435-0698DC1D92FA}" type="datetimeFigureOut">
               <a:rPr lang="en-AU" smtClean="0"/>
-              <a:t>2/09/2026</a:t>
+              <a:t>3/09/2026</a:t>
             </a:fld>
             <a:endParaRPr lang="en-AU"/>
           </a:p>
@@ -1858,7 +1942,7 @@
           <a:p>
             <a:fld id="{78D59BC5-30E6-4D57-A435-0698DC1D92FA}" type="datetimeFigureOut">
               <a:rPr lang="en-AU" smtClean="0"/>
-              <a:t>2/09/2026</a:t>
+              <a:t>3/09/2026</a:t>
             </a:fld>
             <a:endParaRPr lang="en-AU"/>
           </a:p>
@@ -2126,7 +2210,7 @@
           <a:p>
             <a:fld id="{78D59BC5-30E6-4D57-A435-0698DC1D92FA}" type="datetimeFigureOut">
               <a:rPr lang="en-AU" smtClean="0"/>
-              <a:t>2/09/2026</a:t>
+              <a:t>3/09/2026</a:t>
             </a:fld>
             <a:endParaRPr lang="en-AU"/>
           </a:p>
@@ -2541,7 +2625,7 @@
           <a:p>
             <a:fld id="{78D59BC5-30E6-4D57-A435-0698DC1D92FA}" type="datetimeFigureOut">
               <a:rPr lang="en-AU" smtClean="0"/>
-              <a:t>2/09/2026</a:t>
+              <a:t>3/09/2026</a:t>
             </a:fld>
             <a:endParaRPr lang="en-AU"/>
           </a:p>
@@ -2683,7 +2767,7 @@
           <a:p>
             <a:fld id="{78D59BC5-30E6-4D57-A435-0698DC1D92FA}" type="datetimeFigureOut">
               <a:rPr lang="en-AU" smtClean="0"/>
-              <a:t>2/09/2026</a:t>
+              <a:t>3/09/2026</a:t>
             </a:fld>
             <a:endParaRPr lang="en-AU"/>
           </a:p>
@@ -2796,7 +2880,7 @@
           <a:p>
             <a:fld id="{78D59BC5-30E6-4D57-A435-0698DC1D92FA}" type="datetimeFigureOut">
               <a:rPr lang="en-AU" smtClean="0"/>
-              <a:t>2/09/2026</a:t>
+              <a:t>3/09/2026</a:t>
             </a:fld>
             <a:endParaRPr lang="en-AU"/>
           </a:p>
@@ -3109,7 +3193,7 @@
           <a:p>
             <a:fld id="{78D59BC5-30E6-4D57-A435-0698DC1D92FA}" type="datetimeFigureOut">
               <a:rPr lang="en-AU" smtClean="0"/>
-              <a:t>2/09/2026</a:t>
+              <a:t>3/09/2026</a:t>
             </a:fld>
             <a:endParaRPr lang="en-AU"/>
           </a:p>
@@ -3398,7 +3482,7 @@
           <a:p>
             <a:fld id="{78D59BC5-30E6-4D57-A435-0698DC1D92FA}" type="datetimeFigureOut">
               <a:rPr lang="en-AU" smtClean="0"/>
-              <a:t>2/09/2026</a:t>
+              <a:t>3/09/2026</a:t>
             </a:fld>
             <a:endParaRPr lang="en-AU"/>
           </a:p>
@@ -3641,7 +3725,7 @@
           <a:p>
             <a:fld id="{78D59BC5-30E6-4D57-A435-0698DC1D92FA}" type="datetimeFigureOut">
               <a:rPr lang="en-AU" smtClean="0"/>
-              <a:t>2/09/2026</a:t>
+              <a:t>3/09/2026</a:t>
             </a:fld>
             <a:endParaRPr lang="en-AU"/>
           </a:p>
@@ -4076,10 +4160,15 @@
         </p:nvSpPr>
         <p:spPr/>
         <p:txBody>
-          <a:bodyPr/>
+          <a:bodyPr>
+            <a:normAutofit fontScale="90000"/>
+          </a:bodyPr>
           <a:lstStyle/>
           <a:p>
-            <a:endParaRPr lang="en-AU"/>
+            <a:r>
+              <a:rPr lang="en-AU" dirty="0"/>
+              <a:t>Kinetics of CD4 and CD8 with different vaccine formulation</a:t>
+            </a:r>
           </a:p>
         </p:txBody>
       </p:sp>
@@ -4146,10 +4235,10 @@
       </p:grpSpPr>
       <p:pic>
         <p:nvPicPr>
-          <p:cNvPr id="4" name="Picture 3">
-            <a:extLst>
-              <a:ext uri="{FF2B5EF4-FFF2-40B4-BE49-F238E27FC236}">
-                <a16:creationId xmlns:a16="http://schemas.microsoft.com/office/drawing/2014/main" id="{E78267C7-81F6-F7CD-21E0-52D6DAF38AD1}"/>
+          <p:cNvPr id="5" name="Picture 4">
+            <a:extLst>
+              <a:ext uri="{FF2B5EF4-FFF2-40B4-BE49-F238E27FC236}">
+                <a16:creationId xmlns:a16="http://schemas.microsoft.com/office/drawing/2014/main" id="{D0AB36C5-5AD2-E2BE-F2F2-C0FCFF7A8FF7}"/>
               </a:ext>
             </a:extLst>
           </p:cNvPr>
@@ -4222,7 +4311,7 @@
         </p:nvSpPr>
         <p:spPr>
           <a:xfrm>
-            <a:off x="6951407" y="5723434"/>
+            <a:off x="7324552" y="5491119"/>
             <a:ext cx="6096000" cy="769441"/>
           </a:xfrm>
           <a:prstGeom prst="rect">
@@ -4244,114 +4333,270 @@
           </a:p>
         </p:txBody>
       </p:sp>
-      <p:sp>
-        <p:nvSpPr>
-          <p:cNvPr id="10" name="TextBox 9">
-            <a:extLst>
-              <a:ext uri="{FF2B5EF4-FFF2-40B4-BE49-F238E27FC236}">
-                <a16:creationId xmlns:a16="http://schemas.microsoft.com/office/drawing/2014/main" id="{E184445B-420B-15DA-E5FB-D12A3748E37F}"/>
-              </a:ext>
-            </a:extLst>
-          </p:cNvPr>
-          <p:cNvSpPr txBox="1"/>
-          <p:nvPr/>
-        </p:nvSpPr>
-        <p:spPr>
-          <a:xfrm>
-            <a:off x="7143136" y="2970916"/>
-            <a:ext cx="6096000" cy="1446550"/>
-          </a:xfrm>
-          <a:prstGeom prst="rect">
-            <a:avLst/>
-          </a:prstGeom>
-          <a:noFill/>
-        </p:spPr>
-        <p:txBody>
-          <a:bodyPr wrap="square">
-            <a:spAutoFit/>
-          </a:bodyPr>
-          <a:lstStyle/>
-          <a:p>
-            <a:r>
-              <a:rPr lang="en-AU" sz="4400" dirty="0"/>
-              <a:t>TM seems to decay faster</a:t>
-            </a:r>
-            <a:endParaRPr lang="en-AU" dirty="0"/>
-          </a:p>
-        </p:txBody>
-      </p:sp>
-      <p:sp>
-        <p:nvSpPr>
-          <p:cNvPr id="12" name="TextBox 11">
-            <a:extLst>
-              <a:ext uri="{FF2B5EF4-FFF2-40B4-BE49-F238E27FC236}">
-                <a16:creationId xmlns:a16="http://schemas.microsoft.com/office/drawing/2014/main" id="{16BE272D-50C6-F62F-905D-877F0EDF0B26}"/>
-              </a:ext>
-            </a:extLst>
-          </p:cNvPr>
-          <p:cNvSpPr txBox="1"/>
-          <p:nvPr/>
-        </p:nvSpPr>
-        <p:spPr>
-          <a:xfrm>
-            <a:off x="6867832" y="4793758"/>
-            <a:ext cx="6096000" cy="769441"/>
-          </a:xfrm>
-          <a:prstGeom prst="rect">
-            <a:avLst/>
-          </a:prstGeom>
-          <a:noFill/>
-        </p:spPr>
-        <p:txBody>
-          <a:bodyPr wrap="square">
-            <a:spAutoFit/>
-          </a:bodyPr>
-          <a:lstStyle/>
-          <a:p>
-            <a:r>
-              <a:rPr lang="en-AU" sz="4400" dirty="0"/>
-              <a:t>IC seems to be stable</a:t>
-            </a:r>
-            <a:endParaRPr lang="en-AU" dirty="0"/>
-          </a:p>
-        </p:txBody>
-      </p:sp>
-      <p:sp>
-        <p:nvSpPr>
-          <p:cNvPr id="14" name="TextBox 13">
-            <a:extLst>
-              <a:ext uri="{FF2B5EF4-FFF2-40B4-BE49-F238E27FC236}">
-                <a16:creationId xmlns:a16="http://schemas.microsoft.com/office/drawing/2014/main" id="{719F62AA-BAB9-4EEB-7992-E9EDFF74FE2B}"/>
-              </a:ext>
-            </a:extLst>
-          </p:cNvPr>
-          <p:cNvSpPr txBox="1"/>
-          <p:nvPr/>
-        </p:nvSpPr>
-        <p:spPr>
-          <a:xfrm>
-            <a:off x="7143136" y="1850923"/>
-            <a:ext cx="6096000" cy="769441"/>
-          </a:xfrm>
-          <a:prstGeom prst="rect">
-            <a:avLst/>
-          </a:prstGeom>
-          <a:noFill/>
-        </p:spPr>
-        <p:txBody>
-          <a:bodyPr wrap="square">
-            <a:spAutoFit/>
-          </a:bodyPr>
-          <a:lstStyle/>
-          <a:p>
-            <a:r>
-              <a:rPr lang="en-AU" sz="4400" dirty="0"/>
-              <a:t>Biphasic decay</a:t>
-            </a:r>
-            <a:endParaRPr lang="en-AU" dirty="0"/>
-          </a:p>
-        </p:txBody>
-      </p:sp>
+      <p:pic>
+        <p:nvPicPr>
+          <p:cNvPr id="11" name="Picture 10">
+            <a:extLst>
+              <a:ext uri="{FF2B5EF4-FFF2-40B4-BE49-F238E27FC236}">
+                <a16:creationId xmlns:a16="http://schemas.microsoft.com/office/drawing/2014/main" id="{7EABB5C5-5FDF-ADA8-9E92-C9C1D40E7897}"/>
+              </a:ext>
+            </a:extLst>
+          </p:cNvPr>
+          <p:cNvPicPr>
+            <a:picLocks noChangeAspect="1"/>
+          </p:cNvPicPr>
+          <p:nvPr/>
+        </p:nvPicPr>
+        <p:blipFill>
+          <a:blip r:embed="rId4">
+            <a:extLst>
+              <a:ext uri="{28A0092B-C50C-407E-A947-70E740481C1C}">
+                <a14:useLocalDpi xmlns:a14="http://schemas.microsoft.com/office/drawing/2010/main" val="0"/>
+              </a:ext>
+            </a:extLst>
+          </a:blip>
+          <a:stretch>
+            <a:fillRect/>
+          </a:stretch>
+        </p:blipFill>
+        <p:spPr>
+          <a:xfrm>
+            <a:off x="11288793" y="4231120"/>
+            <a:ext cx="648826" cy="592339"/>
+          </a:xfrm>
+          <a:prstGeom prst="rect">
+            <a:avLst/>
+          </a:prstGeom>
+        </p:spPr>
+      </p:pic>
+      <p:pic>
+        <p:nvPicPr>
+          <p:cNvPr id="15" name="Picture 14">
+            <a:extLst>
+              <a:ext uri="{FF2B5EF4-FFF2-40B4-BE49-F238E27FC236}">
+                <a16:creationId xmlns:a16="http://schemas.microsoft.com/office/drawing/2014/main" id="{69BD90F7-22B5-B5CF-9D6E-63D87796841B}"/>
+              </a:ext>
+            </a:extLst>
+          </p:cNvPr>
+          <p:cNvPicPr>
+            <a:picLocks noChangeAspect="1"/>
+          </p:cNvPicPr>
+          <p:nvPr/>
+        </p:nvPicPr>
+        <p:blipFill>
+          <a:blip r:embed="rId5">
+            <a:extLst>
+              <a:ext uri="{28A0092B-C50C-407E-A947-70E740481C1C}">
+                <a14:useLocalDpi xmlns:a14="http://schemas.microsoft.com/office/drawing/2010/main" val="0"/>
+              </a:ext>
+            </a:extLst>
+          </a:blip>
+          <a:stretch>
+            <a:fillRect/>
+          </a:stretch>
+        </p:blipFill>
+        <p:spPr>
+          <a:xfrm>
+            <a:off x="9181715" y="4225380"/>
+            <a:ext cx="1068254" cy="1029474"/>
+          </a:xfrm>
+          <a:prstGeom prst="rect">
+            <a:avLst/>
+          </a:prstGeom>
+        </p:spPr>
+      </p:pic>
+      <p:pic>
+        <p:nvPicPr>
+          <p:cNvPr id="17" name="Picture 16">
+            <a:extLst>
+              <a:ext uri="{FF2B5EF4-FFF2-40B4-BE49-F238E27FC236}">
+                <a16:creationId xmlns:a16="http://schemas.microsoft.com/office/drawing/2014/main" id="{E01E9851-1DC9-08A0-3BF5-34A2CE8CA519}"/>
+              </a:ext>
+            </a:extLst>
+          </p:cNvPr>
+          <p:cNvPicPr>
+            <a:picLocks noChangeAspect="1"/>
+          </p:cNvPicPr>
+          <p:nvPr/>
+        </p:nvPicPr>
+        <p:blipFill>
+          <a:blip r:embed="rId6">
+            <a:extLst>
+              <a:ext uri="{28A0092B-C50C-407E-A947-70E740481C1C}">
+                <a14:useLocalDpi xmlns:a14="http://schemas.microsoft.com/office/drawing/2010/main" val="0"/>
+              </a:ext>
+            </a:extLst>
+          </a:blip>
+          <a:stretch>
+            <a:fillRect/>
+          </a:stretch>
+        </p:blipFill>
+        <p:spPr>
+          <a:xfrm>
+            <a:off x="10355207" y="4238546"/>
+            <a:ext cx="828348" cy="818058"/>
+          </a:xfrm>
+          <a:prstGeom prst="rect">
+            <a:avLst/>
+          </a:prstGeom>
+        </p:spPr>
+      </p:pic>
+      <p:pic>
+        <p:nvPicPr>
+          <p:cNvPr id="19" name="Picture 18">
+            <a:extLst>
+              <a:ext uri="{FF2B5EF4-FFF2-40B4-BE49-F238E27FC236}">
+                <a16:creationId xmlns:a16="http://schemas.microsoft.com/office/drawing/2014/main" id="{EBD6D8C4-DF5C-D67C-05C7-DE7A48D98EDD}"/>
+              </a:ext>
+            </a:extLst>
+          </p:cNvPr>
+          <p:cNvPicPr>
+            <a:picLocks noChangeAspect="1"/>
+          </p:cNvPicPr>
+          <p:nvPr/>
+        </p:nvPicPr>
+        <p:blipFill>
+          <a:blip r:embed="rId7">
+            <a:extLst>
+              <a:ext uri="{28A0092B-C50C-407E-A947-70E740481C1C}">
+                <a14:useLocalDpi xmlns:a14="http://schemas.microsoft.com/office/drawing/2010/main" val="0"/>
+              </a:ext>
+            </a:extLst>
+          </a:blip>
+          <a:stretch>
+            <a:fillRect/>
+          </a:stretch>
+        </p:blipFill>
+        <p:spPr>
+          <a:xfrm>
+            <a:off x="7632939" y="4220361"/>
+            <a:ext cx="1362952" cy="1362952"/>
+          </a:xfrm>
+          <a:prstGeom prst="rect">
+            <a:avLst/>
+          </a:prstGeom>
+        </p:spPr>
+      </p:pic>
+      <p:pic>
+        <p:nvPicPr>
+          <p:cNvPr id="21" name="Picture 20">
+            <a:extLst>
+              <a:ext uri="{FF2B5EF4-FFF2-40B4-BE49-F238E27FC236}">
+                <a16:creationId xmlns:a16="http://schemas.microsoft.com/office/drawing/2014/main" id="{05375FB8-2853-6EA0-D6E3-A907E88F0D47}"/>
+              </a:ext>
+            </a:extLst>
+          </p:cNvPr>
+          <p:cNvPicPr>
+            <a:picLocks noChangeAspect="1"/>
+          </p:cNvPicPr>
+          <p:nvPr/>
+        </p:nvPicPr>
+        <p:blipFill>
+          <a:blip r:embed="rId8"/>
+          <a:stretch>
+            <a:fillRect/>
+          </a:stretch>
+        </p:blipFill>
+        <p:spPr>
+          <a:xfrm>
+            <a:off x="7858955" y="4456626"/>
+            <a:ext cx="857370" cy="857370"/>
+          </a:xfrm>
+          <a:prstGeom prst="rect">
+            <a:avLst/>
+          </a:prstGeom>
+        </p:spPr>
+      </p:pic>
+      <p:pic>
+        <p:nvPicPr>
+          <p:cNvPr id="23" name="Picture 22">
+            <a:extLst>
+              <a:ext uri="{FF2B5EF4-FFF2-40B4-BE49-F238E27FC236}">
+                <a16:creationId xmlns:a16="http://schemas.microsoft.com/office/drawing/2014/main" id="{6DC71F48-0B8C-16C4-8F75-C16EBFC2F589}"/>
+              </a:ext>
+            </a:extLst>
+          </p:cNvPr>
+          <p:cNvPicPr>
+            <a:picLocks noChangeAspect="1"/>
+          </p:cNvPicPr>
+          <p:nvPr/>
+        </p:nvPicPr>
+        <p:blipFill>
+          <a:blip r:embed="rId9"/>
+          <a:stretch>
+            <a:fillRect/>
+          </a:stretch>
+        </p:blipFill>
+        <p:spPr>
+          <a:xfrm>
+            <a:off x="10427771" y="4334966"/>
+            <a:ext cx="669061" cy="528685"/>
+          </a:xfrm>
+          <a:prstGeom prst="rect">
+            <a:avLst/>
+          </a:prstGeom>
+        </p:spPr>
+      </p:pic>
+      <p:pic>
+        <p:nvPicPr>
+          <p:cNvPr id="25" name="Picture 24">
+            <a:extLst>
+              <a:ext uri="{FF2B5EF4-FFF2-40B4-BE49-F238E27FC236}">
+                <a16:creationId xmlns:a16="http://schemas.microsoft.com/office/drawing/2014/main" id="{B223ACDA-6FB3-DF89-AFF0-58977B17AB7B}"/>
+              </a:ext>
+            </a:extLst>
+          </p:cNvPr>
+          <p:cNvPicPr>
+            <a:picLocks noChangeAspect="1"/>
+          </p:cNvPicPr>
+          <p:nvPr/>
+        </p:nvPicPr>
+        <p:blipFill>
+          <a:blip r:embed="rId10"/>
+          <a:stretch>
+            <a:fillRect/>
+          </a:stretch>
+        </p:blipFill>
+        <p:spPr>
+          <a:xfrm>
+            <a:off x="9345361" y="4377722"/>
+            <a:ext cx="740962" cy="610228"/>
+          </a:xfrm>
+          <a:prstGeom prst="rect">
+            <a:avLst/>
+          </a:prstGeom>
+        </p:spPr>
+      </p:pic>
+      <p:pic>
+        <p:nvPicPr>
+          <p:cNvPr id="27" name="Picture 26">
+            <a:extLst>
+              <a:ext uri="{FF2B5EF4-FFF2-40B4-BE49-F238E27FC236}">
+                <a16:creationId xmlns:a16="http://schemas.microsoft.com/office/drawing/2014/main" id="{171C662D-4F0C-95A8-C454-E96A84A538EC}"/>
+              </a:ext>
+            </a:extLst>
+          </p:cNvPr>
+          <p:cNvPicPr>
+            <a:picLocks noChangeAspect="1"/>
+          </p:cNvPicPr>
+          <p:nvPr/>
+        </p:nvPicPr>
+        <p:blipFill>
+          <a:blip r:embed="rId11"/>
+          <a:stretch>
+            <a:fillRect/>
+          </a:stretch>
+        </p:blipFill>
+        <p:spPr>
+          <a:xfrm>
+            <a:off x="11356925" y="4271606"/>
+            <a:ext cx="516436" cy="489679"/>
+          </a:xfrm>
+          <a:prstGeom prst="rect">
+            <a:avLst/>
+          </a:prstGeom>
+        </p:spPr>
+      </p:pic>
     </p:spTree>
     <p:extLst>
       <p:ext uri="{BB962C8B-B14F-4D97-AF65-F5344CB8AC3E}">
@@ -4390,10 +4635,10 @@
       </p:grpSpPr>
       <p:pic>
         <p:nvPicPr>
-          <p:cNvPr id="4" name="Picture 3">
-            <a:extLst>
-              <a:ext uri="{FF2B5EF4-FFF2-40B4-BE49-F238E27FC236}">
-                <a16:creationId xmlns:a16="http://schemas.microsoft.com/office/drawing/2014/main" id="{EE265AD7-FA56-B8F9-AD05-7C561864D8E5}"/>
+          <p:cNvPr id="8" name="Picture 7">
+            <a:extLst>
+              <a:ext uri="{FF2B5EF4-FFF2-40B4-BE49-F238E27FC236}">
+                <a16:creationId xmlns:a16="http://schemas.microsoft.com/office/drawing/2014/main" id="{DF716110-E4DC-F4A8-B4E5-F3E3CC9C72B4}"/>
               </a:ext>
             </a:extLst>
           </p:cNvPr>
@@ -4466,7 +4711,7 @@
         </p:nvSpPr>
         <p:spPr>
           <a:xfrm>
-            <a:off x="6941574" y="5792260"/>
+            <a:off x="7315215" y="5358715"/>
             <a:ext cx="6096000" cy="769441"/>
           </a:xfrm>
           <a:prstGeom prst="rect">
@@ -4488,55 +4733,270 @@
           </a:p>
         </p:txBody>
       </p:sp>
-      <p:sp>
-        <p:nvSpPr>
-          <p:cNvPr id="9" name="TextBox 8">
-            <a:extLst>
-              <a:ext uri="{FF2B5EF4-FFF2-40B4-BE49-F238E27FC236}">
-                <a16:creationId xmlns:a16="http://schemas.microsoft.com/office/drawing/2014/main" id="{634AD6E9-A977-B700-EB73-EC81A80A512A}"/>
-              </a:ext>
-            </a:extLst>
-          </p:cNvPr>
-          <p:cNvSpPr txBox="1"/>
-          <p:nvPr/>
-        </p:nvSpPr>
-        <p:spPr>
-          <a:xfrm>
-            <a:off x="7180014" y="1421182"/>
-            <a:ext cx="6096000" cy="954107"/>
-          </a:xfrm>
-          <a:prstGeom prst="rect">
-            <a:avLst/>
-          </a:prstGeom>
-          <a:noFill/>
-        </p:spPr>
-        <p:txBody>
-          <a:bodyPr wrap="square">
-            <a:spAutoFit/>
-          </a:bodyPr>
-          <a:lstStyle/>
-          <a:p>
-            <a:r>
-              <a:rPr lang="en-AU" sz="2800" dirty="0"/>
-              <a:t>Not only high in </a:t>
-            </a:r>
-            <a:r>
-              <a:rPr lang="en-AU" sz="2800" dirty="0" err="1"/>
-              <a:t>tet</a:t>
-            </a:r>
-            <a:r>
-              <a:rPr lang="en-AU" sz="2800" dirty="0"/>
-              <a:t>+ responses, </a:t>
-            </a:r>
-          </a:p>
-          <a:p>
-            <a:r>
-              <a:rPr lang="en-AU" sz="2800" dirty="0"/>
-              <a:t>TM is also high in %effector</a:t>
-            </a:r>
-          </a:p>
-        </p:txBody>
-      </p:sp>
+      <p:pic>
+        <p:nvPicPr>
+          <p:cNvPr id="11" name="Picture 10">
+            <a:extLst>
+              <a:ext uri="{FF2B5EF4-FFF2-40B4-BE49-F238E27FC236}">
+                <a16:creationId xmlns:a16="http://schemas.microsoft.com/office/drawing/2014/main" id="{6D7BA06C-97E8-E2B9-0EAD-FD5D41210812}"/>
+              </a:ext>
+            </a:extLst>
+          </p:cNvPr>
+          <p:cNvPicPr>
+            <a:picLocks noChangeAspect="1"/>
+          </p:cNvPicPr>
+          <p:nvPr/>
+        </p:nvPicPr>
+        <p:blipFill>
+          <a:blip r:embed="rId3">
+            <a:extLst>
+              <a:ext uri="{28A0092B-C50C-407E-A947-70E740481C1C}">
+                <a14:useLocalDpi xmlns:a14="http://schemas.microsoft.com/office/drawing/2010/main" val="0"/>
+              </a:ext>
+            </a:extLst>
+          </a:blip>
+          <a:stretch>
+            <a:fillRect/>
+          </a:stretch>
+        </p:blipFill>
+        <p:spPr>
+          <a:xfrm>
+            <a:off x="10531120" y="4751897"/>
+            <a:ext cx="822679" cy="395436"/>
+          </a:xfrm>
+          <a:prstGeom prst="rect">
+            <a:avLst/>
+          </a:prstGeom>
+        </p:spPr>
+      </p:pic>
+      <p:pic>
+        <p:nvPicPr>
+          <p:cNvPr id="13" name="Picture 12">
+            <a:extLst>
+              <a:ext uri="{FF2B5EF4-FFF2-40B4-BE49-F238E27FC236}">
+                <a16:creationId xmlns:a16="http://schemas.microsoft.com/office/drawing/2014/main" id="{038F6C43-7FAC-D64B-A0A5-ECBE52EEA7BA}"/>
+              </a:ext>
+            </a:extLst>
+          </p:cNvPr>
+          <p:cNvPicPr>
+            <a:picLocks noChangeAspect="1"/>
+          </p:cNvPicPr>
+          <p:nvPr/>
+        </p:nvPicPr>
+        <p:blipFill>
+          <a:blip r:embed="rId4">
+            <a:extLst>
+              <a:ext uri="{28A0092B-C50C-407E-A947-70E740481C1C}">
+                <a14:useLocalDpi xmlns:a14="http://schemas.microsoft.com/office/drawing/2010/main" val="0"/>
+              </a:ext>
+            </a:extLst>
+          </a:blip>
+          <a:stretch>
+            <a:fillRect/>
+          </a:stretch>
+        </p:blipFill>
+        <p:spPr>
+          <a:xfrm>
+            <a:off x="10525452" y="4107101"/>
+            <a:ext cx="828348" cy="395436"/>
+          </a:xfrm>
+          <a:prstGeom prst="rect">
+            <a:avLst/>
+          </a:prstGeom>
+        </p:spPr>
+      </p:pic>
+      <p:pic>
+        <p:nvPicPr>
+          <p:cNvPr id="15" name="Picture 14">
+            <a:extLst>
+              <a:ext uri="{FF2B5EF4-FFF2-40B4-BE49-F238E27FC236}">
+                <a16:creationId xmlns:a16="http://schemas.microsoft.com/office/drawing/2014/main" id="{77E1A9F4-B4A2-E06E-0F96-16467242830F}"/>
+              </a:ext>
+            </a:extLst>
+          </p:cNvPr>
+          <p:cNvPicPr>
+            <a:picLocks noChangeAspect="1"/>
+          </p:cNvPicPr>
+          <p:nvPr/>
+        </p:nvPicPr>
+        <p:blipFill>
+          <a:blip r:embed="rId5">
+            <a:extLst>
+              <a:ext uri="{28A0092B-C50C-407E-A947-70E740481C1C}">
+                <a14:useLocalDpi xmlns:a14="http://schemas.microsoft.com/office/drawing/2010/main" val="0"/>
+              </a:ext>
+            </a:extLst>
+          </a:blip>
+          <a:stretch>
+            <a:fillRect/>
+          </a:stretch>
+        </p:blipFill>
+        <p:spPr>
+          <a:xfrm>
+            <a:off x="9292323" y="4107100"/>
+            <a:ext cx="1068254" cy="1040233"/>
+          </a:xfrm>
+          <a:prstGeom prst="rect">
+            <a:avLst/>
+          </a:prstGeom>
+        </p:spPr>
+      </p:pic>
+      <p:pic>
+        <p:nvPicPr>
+          <p:cNvPr id="17" name="Picture 16">
+            <a:extLst>
+              <a:ext uri="{FF2B5EF4-FFF2-40B4-BE49-F238E27FC236}">
+                <a16:creationId xmlns:a16="http://schemas.microsoft.com/office/drawing/2014/main" id="{2807E008-40E5-3ECB-4C3D-56B77B9292DA}"/>
+              </a:ext>
+            </a:extLst>
+          </p:cNvPr>
+          <p:cNvPicPr>
+            <a:picLocks noChangeAspect="1"/>
+          </p:cNvPicPr>
+          <p:nvPr/>
+        </p:nvPicPr>
+        <p:blipFill>
+          <a:blip r:embed="rId6">
+            <a:extLst>
+              <a:ext uri="{28A0092B-C50C-407E-A947-70E740481C1C}">
+                <a14:useLocalDpi xmlns:a14="http://schemas.microsoft.com/office/drawing/2010/main" val="0"/>
+              </a:ext>
+            </a:extLst>
+          </a:blip>
+          <a:stretch>
+            <a:fillRect/>
+          </a:stretch>
+        </p:blipFill>
+        <p:spPr>
+          <a:xfrm>
+            <a:off x="7794689" y="4107100"/>
+            <a:ext cx="1362952" cy="1362952"/>
+          </a:xfrm>
+          <a:prstGeom prst="rect">
+            <a:avLst/>
+          </a:prstGeom>
+        </p:spPr>
+      </p:pic>
+      <p:pic>
+        <p:nvPicPr>
+          <p:cNvPr id="19" name="Picture 18">
+            <a:extLst>
+              <a:ext uri="{FF2B5EF4-FFF2-40B4-BE49-F238E27FC236}">
+                <a16:creationId xmlns:a16="http://schemas.microsoft.com/office/drawing/2014/main" id="{8AEC625C-E591-9204-B4E0-1F81CF047AAF}"/>
+              </a:ext>
+            </a:extLst>
+          </p:cNvPr>
+          <p:cNvPicPr>
+            <a:picLocks noChangeAspect="1"/>
+          </p:cNvPicPr>
+          <p:nvPr/>
+        </p:nvPicPr>
+        <p:blipFill>
+          <a:blip r:embed="rId7"/>
+          <a:stretch>
+            <a:fillRect/>
+          </a:stretch>
+        </p:blipFill>
+        <p:spPr>
+          <a:xfrm>
+            <a:off x="8020705" y="4343365"/>
+            <a:ext cx="857370" cy="857370"/>
+          </a:xfrm>
+          <a:prstGeom prst="rect">
+            <a:avLst/>
+          </a:prstGeom>
+        </p:spPr>
+      </p:pic>
+      <p:pic>
+        <p:nvPicPr>
+          <p:cNvPr id="21" name="Picture 20">
+            <a:extLst>
+              <a:ext uri="{FF2B5EF4-FFF2-40B4-BE49-F238E27FC236}">
+                <a16:creationId xmlns:a16="http://schemas.microsoft.com/office/drawing/2014/main" id="{D6774A58-4A77-4D86-5E11-AABC4859F66F}"/>
+              </a:ext>
+            </a:extLst>
+          </p:cNvPr>
+          <p:cNvPicPr>
+            <a:picLocks noChangeAspect="1"/>
+          </p:cNvPicPr>
+          <p:nvPr/>
+        </p:nvPicPr>
+        <p:blipFill>
+          <a:blip r:embed="rId8"/>
+          <a:stretch>
+            <a:fillRect/>
+          </a:stretch>
+        </p:blipFill>
+        <p:spPr>
+          <a:xfrm>
+            <a:off x="9396627" y="4295562"/>
+            <a:ext cx="796764" cy="629595"/>
+          </a:xfrm>
+          <a:prstGeom prst="rect">
+            <a:avLst/>
+          </a:prstGeom>
+        </p:spPr>
+      </p:pic>
+      <p:pic>
+        <p:nvPicPr>
+          <p:cNvPr id="23" name="Picture 22">
+            <a:extLst>
+              <a:ext uri="{FF2B5EF4-FFF2-40B4-BE49-F238E27FC236}">
+                <a16:creationId xmlns:a16="http://schemas.microsoft.com/office/drawing/2014/main" id="{DC6B3255-5B34-CD67-B343-1D15C5178D07}"/>
+              </a:ext>
+            </a:extLst>
+          </p:cNvPr>
+          <p:cNvPicPr>
+            <a:picLocks noChangeAspect="1"/>
+          </p:cNvPicPr>
+          <p:nvPr/>
+        </p:nvPicPr>
+        <p:blipFill>
+          <a:blip r:embed="rId9"/>
+          <a:stretch>
+            <a:fillRect/>
+          </a:stretch>
+        </p:blipFill>
+        <p:spPr>
+          <a:xfrm>
+            <a:off x="10649913" y="4064487"/>
+            <a:ext cx="579425" cy="438050"/>
+          </a:xfrm>
+          <a:prstGeom prst="rect">
+            <a:avLst/>
+          </a:prstGeom>
+        </p:spPr>
+      </p:pic>
+      <p:pic>
+        <p:nvPicPr>
+          <p:cNvPr id="25" name="Picture 24">
+            <a:extLst>
+              <a:ext uri="{FF2B5EF4-FFF2-40B4-BE49-F238E27FC236}">
+                <a16:creationId xmlns:a16="http://schemas.microsoft.com/office/drawing/2014/main" id="{4203A8C4-A97A-2D32-FB06-A8E65B056C8E}"/>
+              </a:ext>
+            </a:extLst>
+          </p:cNvPr>
+          <p:cNvPicPr>
+            <a:picLocks noChangeAspect="1"/>
+          </p:cNvPicPr>
+          <p:nvPr/>
+        </p:nvPicPr>
+        <p:blipFill>
+          <a:blip r:embed="rId10"/>
+          <a:stretch>
+            <a:fillRect/>
+          </a:stretch>
+        </p:blipFill>
+        <p:spPr>
+          <a:xfrm>
+            <a:off x="10681407" y="4704775"/>
+            <a:ext cx="523060" cy="495960"/>
+          </a:xfrm>
+          <a:prstGeom prst="rect">
+            <a:avLst/>
+          </a:prstGeom>
+        </p:spPr>
+      </p:pic>
     </p:spTree>
     <p:extLst>
       <p:ext uri="{BB962C8B-B14F-4D97-AF65-F5344CB8AC3E}">
@@ -4573,42 +5033,6 @@
           <a:chExt cx="0" cy="0"/>
         </a:xfrm>
       </p:grpSpPr>
-      <p:pic>
-        <p:nvPicPr>
-          <p:cNvPr id="4" name="Picture 3">
-            <a:extLst>
-              <a:ext uri="{FF2B5EF4-FFF2-40B4-BE49-F238E27FC236}">
-                <a16:creationId xmlns:a16="http://schemas.microsoft.com/office/drawing/2014/main" id="{48AB99F4-993D-296D-169F-F953A039860D}"/>
-              </a:ext>
-            </a:extLst>
-          </p:cNvPr>
-          <p:cNvPicPr>
-            <a:picLocks noChangeAspect="1"/>
-          </p:cNvPicPr>
-          <p:nvPr/>
-        </p:nvPicPr>
-        <p:blipFill>
-          <a:blip r:embed="rId2">
-            <a:extLst>
-              <a:ext uri="{28A0092B-C50C-407E-A947-70E740481C1C}">
-                <a14:useLocalDpi xmlns:a14="http://schemas.microsoft.com/office/drawing/2010/main" val="0"/>
-              </a:ext>
-            </a:extLst>
-          </a:blip>
-          <a:stretch>
-            <a:fillRect/>
-          </a:stretch>
-        </p:blipFill>
-        <p:spPr>
-          <a:xfrm>
-            <a:off x="0" y="1371589"/>
-            <a:ext cx="7315215" cy="5486411"/>
-          </a:xfrm>
-          <a:prstGeom prst="rect">
-            <a:avLst/>
-          </a:prstGeom>
-        </p:spPr>
-      </p:pic>
       <p:sp>
         <p:nvSpPr>
           <p:cNvPr id="2" name="Title 1">
@@ -4637,12 +5061,312 @@
           </a:p>
         </p:txBody>
       </p:sp>
-      <p:sp>
-        <p:nvSpPr>
-          <p:cNvPr id="7" name="TextBox 6">
-            <a:extLst>
-              <a:ext uri="{FF2B5EF4-FFF2-40B4-BE49-F238E27FC236}">
-                <a16:creationId xmlns:a16="http://schemas.microsoft.com/office/drawing/2014/main" id="{84B892EF-617D-5D21-C7F5-7467F7474FA4}"/>
+      <p:pic>
+        <p:nvPicPr>
+          <p:cNvPr id="5" name="Picture 4">
+            <a:extLst>
+              <a:ext uri="{FF2B5EF4-FFF2-40B4-BE49-F238E27FC236}">
+                <a16:creationId xmlns:a16="http://schemas.microsoft.com/office/drawing/2014/main" id="{8F1CE5EC-9F4B-1EE3-56C0-06E1E551738A}"/>
+              </a:ext>
+            </a:extLst>
+          </p:cNvPr>
+          <p:cNvPicPr>
+            <a:picLocks noChangeAspect="1"/>
+          </p:cNvPicPr>
+          <p:nvPr/>
+        </p:nvPicPr>
+        <p:blipFill>
+          <a:blip r:embed="rId2">
+            <a:extLst>
+              <a:ext uri="{28A0092B-C50C-407E-A947-70E740481C1C}">
+                <a14:useLocalDpi xmlns:a14="http://schemas.microsoft.com/office/drawing/2010/main" val="0"/>
+              </a:ext>
+            </a:extLst>
+          </a:blip>
+          <a:stretch>
+            <a:fillRect/>
+          </a:stretch>
+        </p:blipFill>
+        <p:spPr>
+          <a:xfrm>
+            <a:off x="0" y="1371589"/>
+            <a:ext cx="7315215" cy="5486411"/>
+          </a:xfrm>
+          <a:prstGeom prst="rect">
+            <a:avLst/>
+          </a:prstGeom>
+        </p:spPr>
+      </p:pic>
+      <p:pic>
+        <p:nvPicPr>
+          <p:cNvPr id="8" name="Picture 7">
+            <a:extLst>
+              <a:ext uri="{FF2B5EF4-FFF2-40B4-BE49-F238E27FC236}">
+                <a16:creationId xmlns:a16="http://schemas.microsoft.com/office/drawing/2014/main" id="{A36AA18C-ABBA-02E3-E5A8-3C10B92126CD}"/>
+              </a:ext>
+            </a:extLst>
+          </p:cNvPr>
+          <p:cNvPicPr>
+            <a:picLocks noChangeAspect="1"/>
+          </p:cNvPicPr>
+          <p:nvPr/>
+        </p:nvPicPr>
+        <p:blipFill>
+          <a:blip r:embed="rId3">
+            <a:extLst>
+              <a:ext uri="{28A0092B-C50C-407E-A947-70E740481C1C}">
+                <a14:useLocalDpi xmlns:a14="http://schemas.microsoft.com/office/drawing/2010/main" val="0"/>
+              </a:ext>
+            </a:extLst>
+          </a:blip>
+          <a:stretch>
+            <a:fillRect/>
+          </a:stretch>
+        </p:blipFill>
+        <p:spPr>
+          <a:xfrm>
+            <a:off x="9910085" y="5410355"/>
+            <a:ext cx="1045056" cy="395436"/>
+          </a:xfrm>
+          <a:prstGeom prst="rect">
+            <a:avLst/>
+          </a:prstGeom>
+        </p:spPr>
+      </p:pic>
+      <p:pic>
+        <p:nvPicPr>
+          <p:cNvPr id="10" name="Picture 9">
+            <a:extLst>
+              <a:ext uri="{FF2B5EF4-FFF2-40B4-BE49-F238E27FC236}">
+                <a16:creationId xmlns:a16="http://schemas.microsoft.com/office/drawing/2014/main" id="{21C86F17-9B9D-4B78-BA0A-F27870C4D2AE}"/>
+              </a:ext>
+            </a:extLst>
+          </p:cNvPr>
+          <p:cNvPicPr>
+            <a:picLocks noChangeAspect="1"/>
+          </p:cNvPicPr>
+          <p:nvPr/>
+        </p:nvPicPr>
+        <p:blipFill>
+          <a:blip r:embed="rId4">
+            <a:extLst>
+              <a:ext uri="{28A0092B-C50C-407E-A947-70E740481C1C}">
+                <a14:useLocalDpi xmlns:a14="http://schemas.microsoft.com/office/drawing/2010/main" val="0"/>
+              </a:ext>
+            </a:extLst>
+          </a:blip>
+          <a:stretch>
+            <a:fillRect/>
+          </a:stretch>
+        </p:blipFill>
+        <p:spPr>
+          <a:xfrm>
+            <a:off x="9898548" y="4921511"/>
+            <a:ext cx="1056593" cy="395436"/>
+          </a:xfrm>
+          <a:prstGeom prst="rect">
+            <a:avLst/>
+          </a:prstGeom>
+        </p:spPr>
+      </p:pic>
+      <p:pic>
+        <p:nvPicPr>
+          <p:cNvPr id="12" name="Picture 11">
+            <a:extLst>
+              <a:ext uri="{FF2B5EF4-FFF2-40B4-BE49-F238E27FC236}">
+                <a16:creationId xmlns:a16="http://schemas.microsoft.com/office/drawing/2014/main" id="{8452D5FE-5F5B-0768-1C1D-83D0F95231F8}"/>
+              </a:ext>
+            </a:extLst>
+          </p:cNvPr>
+          <p:cNvPicPr>
+            <a:picLocks noChangeAspect="1"/>
+          </p:cNvPicPr>
+          <p:nvPr/>
+        </p:nvPicPr>
+        <p:blipFill>
+          <a:blip r:embed="rId5">
+            <a:extLst>
+              <a:ext uri="{28A0092B-C50C-407E-A947-70E740481C1C}">
+                <a14:useLocalDpi xmlns:a14="http://schemas.microsoft.com/office/drawing/2010/main" val="0"/>
+              </a:ext>
+            </a:extLst>
+          </a:blip>
+          <a:stretch>
+            <a:fillRect/>
+          </a:stretch>
+        </p:blipFill>
+        <p:spPr>
+          <a:xfrm>
+            <a:off x="9886888" y="4432666"/>
+            <a:ext cx="1068254" cy="395437"/>
+          </a:xfrm>
+          <a:prstGeom prst="rect">
+            <a:avLst/>
+          </a:prstGeom>
+        </p:spPr>
+      </p:pic>
+      <p:pic>
+        <p:nvPicPr>
+          <p:cNvPr id="14" name="Picture 13">
+            <a:extLst>
+              <a:ext uri="{FF2B5EF4-FFF2-40B4-BE49-F238E27FC236}">
+                <a16:creationId xmlns:a16="http://schemas.microsoft.com/office/drawing/2014/main" id="{FD1F0CBF-401D-4FDB-FEA1-B320944E3B96}"/>
+              </a:ext>
+            </a:extLst>
+          </p:cNvPr>
+          <p:cNvPicPr>
+            <a:picLocks noChangeAspect="1"/>
+          </p:cNvPicPr>
+          <p:nvPr/>
+        </p:nvPicPr>
+        <p:blipFill>
+          <a:blip r:embed="rId6">
+            <a:extLst>
+              <a:ext uri="{28A0092B-C50C-407E-A947-70E740481C1C}">
+                <a14:useLocalDpi xmlns:a14="http://schemas.microsoft.com/office/drawing/2010/main" val="0"/>
+              </a:ext>
+            </a:extLst>
+          </a:blip>
+          <a:stretch>
+            <a:fillRect/>
+          </a:stretch>
+        </p:blipFill>
+        <p:spPr>
+          <a:xfrm>
+            <a:off x="8389254" y="4432666"/>
+            <a:ext cx="1362952" cy="1362952"/>
+          </a:xfrm>
+          <a:prstGeom prst="rect">
+            <a:avLst/>
+          </a:prstGeom>
+        </p:spPr>
+      </p:pic>
+      <p:pic>
+        <p:nvPicPr>
+          <p:cNvPr id="16" name="Picture 15">
+            <a:extLst>
+              <a:ext uri="{FF2B5EF4-FFF2-40B4-BE49-F238E27FC236}">
+                <a16:creationId xmlns:a16="http://schemas.microsoft.com/office/drawing/2014/main" id="{BF8B96B0-C68A-51EA-3F53-A22F5760D6E5}"/>
+              </a:ext>
+            </a:extLst>
+          </p:cNvPr>
+          <p:cNvPicPr>
+            <a:picLocks noChangeAspect="1"/>
+          </p:cNvPicPr>
+          <p:nvPr/>
+        </p:nvPicPr>
+        <p:blipFill>
+          <a:blip r:embed="rId7"/>
+          <a:stretch>
+            <a:fillRect/>
+          </a:stretch>
+        </p:blipFill>
+        <p:spPr>
+          <a:xfrm>
+            <a:off x="8615270" y="4668931"/>
+            <a:ext cx="857370" cy="857370"/>
+          </a:xfrm>
+          <a:prstGeom prst="rect">
+            <a:avLst/>
+          </a:prstGeom>
+        </p:spPr>
+      </p:pic>
+      <p:pic>
+        <p:nvPicPr>
+          <p:cNvPr id="18" name="Picture 17">
+            <a:extLst>
+              <a:ext uri="{FF2B5EF4-FFF2-40B4-BE49-F238E27FC236}">
+                <a16:creationId xmlns:a16="http://schemas.microsoft.com/office/drawing/2014/main" id="{423FFD12-72CC-1D42-F0B7-FDBB572F8539}"/>
+              </a:ext>
+            </a:extLst>
+          </p:cNvPr>
+          <p:cNvPicPr>
+            <a:picLocks noChangeAspect="1"/>
+          </p:cNvPicPr>
+          <p:nvPr/>
+        </p:nvPicPr>
+        <p:blipFill>
+          <a:blip r:embed="rId8"/>
+          <a:stretch>
+            <a:fillRect/>
+          </a:stretch>
+        </p:blipFill>
+        <p:spPr>
+          <a:xfrm>
+            <a:off x="10114528" y="4426587"/>
+            <a:ext cx="610349" cy="395438"/>
+          </a:xfrm>
+          <a:prstGeom prst="rect">
+            <a:avLst/>
+          </a:prstGeom>
+        </p:spPr>
+      </p:pic>
+      <p:pic>
+        <p:nvPicPr>
+          <p:cNvPr id="20" name="Picture 19">
+            <a:extLst>
+              <a:ext uri="{FF2B5EF4-FFF2-40B4-BE49-F238E27FC236}">
+                <a16:creationId xmlns:a16="http://schemas.microsoft.com/office/drawing/2014/main" id="{49078649-09B8-5059-EB4D-BE02C6EAABD8}"/>
+              </a:ext>
+            </a:extLst>
+          </p:cNvPr>
+          <p:cNvPicPr>
+            <a:picLocks noChangeAspect="1"/>
+          </p:cNvPicPr>
+          <p:nvPr/>
+        </p:nvPicPr>
+        <p:blipFill>
+          <a:blip r:embed="rId9"/>
+          <a:stretch>
+            <a:fillRect/>
+          </a:stretch>
+        </p:blipFill>
+        <p:spPr>
+          <a:xfrm>
+            <a:off x="10129990" y="4905385"/>
+            <a:ext cx="551243" cy="395437"/>
+          </a:xfrm>
+          <a:prstGeom prst="rect">
+            <a:avLst/>
+          </a:prstGeom>
+        </p:spPr>
+      </p:pic>
+      <p:pic>
+        <p:nvPicPr>
+          <p:cNvPr id="22" name="Picture 21">
+            <a:extLst>
+              <a:ext uri="{FF2B5EF4-FFF2-40B4-BE49-F238E27FC236}">
+                <a16:creationId xmlns:a16="http://schemas.microsoft.com/office/drawing/2014/main" id="{8DD209F4-5D07-74EC-87F0-C781F6670219}"/>
+              </a:ext>
+            </a:extLst>
+          </p:cNvPr>
+          <p:cNvPicPr>
+            <a:picLocks noChangeAspect="1"/>
+          </p:cNvPicPr>
+          <p:nvPr/>
+        </p:nvPicPr>
+        <p:blipFill>
+          <a:blip r:embed="rId10"/>
+          <a:stretch>
+            <a:fillRect/>
+          </a:stretch>
+        </p:blipFill>
+        <p:spPr>
+          <a:xfrm>
+            <a:off x="10158173" y="5410355"/>
+            <a:ext cx="523060" cy="385263"/>
+          </a:xfrm>
+          <a:prstGeom prst="rect">
+            <a:avLst/>
+          </a:prstGeom>
+        </p:spPr>
+      </p:pic>
+      <p:sp>
+        <p:nvSpPr>
+          <p:cNvPr id="24" name="TextBox 23">
+            <a:extLst>
+              <a:ext uri="{FF2B5EF4-FFF2-40B4-BE49-F238E27FC236}">
+                <a16:creationId xmlns:a16="http://schemas.microsoft.com/office/drawing/2014/main" id="{6F2A491B-B1EE-6BC9-10E7-B00FDC71D3F2}"/>
               </a:ext>
             </a:extLst>
           </p:cNvPr>
@@ -4651,8 +5375,8 @@
         </p:nvSpPr>
         <p:spPr>
           <a:xfrm>
-            <a:off x="6941574" y="5792260"/>
-            <a:ext cx="6096000" cy="769441"/>
+            <a:off x="7379682" y="5714290"/>
+            <a:ext cx="6094324" cy="769441"/>
           </a:xfrm>
           <a:prstGeom prst="rect">
             <a:avLst/>
@@ -4667,9 +5391,9 @@
           <a:p>
             <a:r>
               <a:rPr lang="en-AU" sz="4400" dirty="0"/>
-              <a:t>TM&gt;TMd21?SOL?IC</a:t>
+              <a:t>TM&gt;TMd21=SOL=IC</a:t>
             </a:r>
-            <a:endParaRPr lang="en-AU" dirty="0"/>
+            <a:endParaRPr lang="en-AU" sz="1800" dirty="0"/>
           </a:p>
         </p:txBody>
       </p:sp>
@@ -4709,42 +5433,6 @@
           <a:chExt cx="0" cy="0"/>
         </a:xfrm>
       </p:grpSpPr>
-      <p:pic>
-        <p:nvPicPr>
-          <p:cNvPr id="5" name="Picture 4">
-            <a:extLst>
-              <a:ext uri="{FF2B5EF4-FFF2-40B4-BE49-F238E27FC236}">
-                <a16:creationId xmlns:a16="http://schemas.microsoft.com/office/drawing/2014/main" id="{23EEB72F-EB39-BE9E-4355-BAD526C66AAB}"/>
-              </a:ext>
-            </a:extLst>
-          </p:cNvPr>
-          <p:cNvPicPr>
-            <a:picLocks noChangeAspect="1"/>
-          </p:cNvPicPr>
-          <p:nvPr/>
-        </p:nvPicPr>
-        <p:blipFill>
-          <a:blip r:embed="rId3">
-            <a:extLst>
-              <a:ext uri="{28A0092B-C50C-407E-A947-70E740481C1C}">
-                <a14:useLocalDpi xmlns:a14="http://schemas.microsoft.com/office/drawing/2010/main" val="0"/>
-              </a:ext>
-            </a:extLst>
-          </a:blip>
-          <a:stretch>
-            <a:fillRect/>
-          </a:stretch>
-        </p:blipFill>
-        <p:spPr>
-          <a:xfrm>
-            <a:off x="0" y="1371589"/>
-            <a:ext cx="7315215" cy="5486411"/>
-          </a:xfrm>
-          <a:prstGeom prst="rect">
-            <a:avLst/>
-          </a:prstGeom>
-        </p:spPr>
-      </p:pic>
       <p:sp>
         <p:nvSpPr>
           <p:cNvPr id="2" name="Title 1">
@@ -4775,10 +5463,10 @@
       </p:sp>
       <p:sp>
         <p:nvSpPr>
-          <p:cNvPr id="14" name="TextBox 13">
-            <a:extLst>
-              <a:ext uri="{FF2B5EF4-FFF2-40B4-BE49-F238E27FC236}">
-                <a16:creationId xmlns:a16="http://schemas.microsoft.com/office/drawing/2014/main" id="{68021578-FB35-3F59-8CE0-DAFA507E7E36}"/>
+          <p:cNvPr id="8" name="TextBox 7">
+            <a:extLst>
+              <a:ext uri="{FF2B5EF4-FFF2-40B4-BE49-F238E27FC236}">
+                <a16:creationId xmlns:a16="http://schemas.microsoft.com/office/drawing/2014/main" id="{F9DC51BD-8C0C-467A-5E3F-96427C1654AB}"/>
               </a:ext>
             </a:extLst>
           </p:cNvPr>
@@ -4787,7 +5475,7 @@
         </p:nvSpPr>
         <p:spPr>
           <a:xfrm>
-            <a:off x="6838336" y="1854082"/>
+            <a:off x="8445481" y="5723434"/>
             <a:ext cx="6096000" cy="769441"/>
           </a:xfrm>
           <a:prstGeom prst="rect">
@@ -4803,48 +5491,312 @@
           <a:p>
             <a:r>
               <a:rPr lang="en-AU" sz="4400" dirty="0"/>
-              <a:t>Biphasic decay</a:t>
+              <a:t>similar decay</a:t>
             </a:r>
             <a:endParaRPr lang="en-AU" dirty="0"/>
           </a:p>
         </p:txBody>
       </p:sp>
-      <p:sp>
-        <p:nvSpPr>
-          <p:cNvPr id="8" name="TextBox 7">
-            <a:extLst>
-              <a:ext uri="{FF2B5EF4-FFF2-40B4-BE49-F238E27FC236}">
-                <a16:creationId xmlns:a16="http://schemas.microsoft.com/office/drawing/2014/main" id="{F9DC51BD-8C0C-467A-5E3F-96427C1654AB}"/>
-              </a:ext>
-            </a:extLst>
-          </p:cNvPr>
-          <p:cNvSpPr txBox="1"/>
-          <p:nvPr/>
-        </p:nvSpPr>
-        <p:spPr>
-          <a:xfrm>
-            <a:off x="6720349" y="4992329"/>
-            <a:ext cx="6096000" cy="769441"/>
-          </a:xfrm>
-          <a:prstGeom prst="rect">
-            <a:avLst/>
-          </a:prstGeom>
-          <a:noFill/>
-        </p:spPr>
-        <p:txBody>
-          <a:bodyPr wrap="square">
-            <a:spAutoFit/>
-          </a:bodyPr>
-          <a:lstStyle/>
-          <a:p>
-            <a:r>
-              <a:rPr lang="en-AU" sz="4400" dirty="0"/>
-              <a:t>Maybe similar decay</a:t>
-            </a:r>
-            <a:endParaRPr lang="en-AU" dirty="0"/>
-          </a:p>
-        </p:txBody>
-      </p:sp>
+      <p:pic>
+        <p:nvPicPr>
+          <p:cNvPr id="4" name="Picture 3">
+            <a:extLst>
+              <a:ext uri="{FF2B5EF4-FFF2-40B4-BE49-F238E27FC236}">
+                <a16:creationId xmlns:a16="http://schemas.microsoft.com/office/drawing/2014/main" id="{791C457C-0A3D-2FD0-8ED2-869FBAC7EC46}"/>
+              </a:ext>
+            </a:extLst>
+          </p:cNvPr>
+          <p:cNvPicPr>
+            <a:picLocks noChangeAspect="1"/>
+          </p:cNvPicPr>
+          <p:nvPr/>
+        </p:nvPicPr>
+        <p:blipFill>
+          <a:blip r:embed="rId3">
+            <a:extLst>
+              <a:ext uri="{28A0092B-C50C-407E-A947-70E740481C1C}">
+                <a14:useLocalDpi xmlns:a14="http://schemas.microsoft.com/office/drawing/2010/main" val="0"/>
+              </a:ext>
+            </a:extLst>
+          </a:blip>
+          <a:stretch>
+            <a:fillRect/>
+          </a:stretch>
+        </p:blipFill>
+        <p:spPr>
+          <a:xfrm>
+            <a:off x="0" y="1371589"/>
+            <a:ext cx="7315215" cy="5486411"/>
+          </a:xfrm>
+          <a:prstGeom prst="rect">
+            <a:avLst/>
+          </a:prstGeom>
+        </p:spPr>
+      </p:pic>
+      <p:pic>
+        <p:nvPicPr>
+          <p:cNvPr id="7" name="Picture 6">
+            <a:extLst>
+              <a:ext uri="{FF2B5EF4-FFF2-40B4-BE49-F238E27FC236}">
+                <a16:creationId xmlns:a16="http://schemas.microsoft.com/office/drawing/2014/main" id="{05323BE8-CD1D-3D75-6173-D10108757B45}"/>
+              </a:ext>
+            </a:extLst>
+          </p:cNvPr>
+          <p:cNvPicPr>
+            <a:picLocks noChangeAspect="1"/>
+          </p:cNvPicPr>
+          <p:nvPr/>
+        </p:nvPicPr>
+        <p:blipFill>
+          <a:blip r:embed="rId4">
+            <a:extLst>
+              <a:ext uri="{28A0092B-C50C-407E-A947-70E740481C1C}">
+                <a14:useLocalDpi xmlns:a14="http://schemas.microsoft.com/office/drawing/2010/main" val="0"/>
+              </a:ext>
+            </a:extLst>
+          </a:blip>
+          <a:stretch>
+            <a:fillRect/>
+          </a:stretch>
+        </p:blipFill>
+        <p:spPr>
+          <a:xfrm>
+            <a:off x="10909937" y="5108750"/>
+            <a:ext cx="604636" cy="604636"/>
+          </a:xfrm>
+          <a:prstGeom prst="rect">
+            <a:avLst/>
+          </a:prstGeom>
+        </p:spPr>
+      </p:pic>
+      <p:pic>
+        <p:nvPicPr>
+          <p:cNvPr id="10" name="Picture 9">
+            <a:extLst>
+              <a:ext uri="{FF2B5EF4-FFF2-40B4-BE49-F238E27FC236}">
+                <a16:creationId xmlns:a16="http://schemas.microsoft.com/office/drawing/2014/main" id="{B559A29D-F797-C411-E71E-71F66F2B2B8F}"/>
+              </a:ext>
+            </a:extLst>
+          </p:cNvPr>
+          <p:cNvPicPr>
+            <a:picLocks noChangeAspect="1"/>
+          </p:cNvPicPr>
+          <p:nvPr/>
+        </p:nvPicPr>
+        <p:blipFill>
+          <a:blip r:embed="rId5">
+            <a:extLst>
+              <a:ext uri="{28A0092B-C50C-407E-A947-70E740481C1C}">
+                <a14:useLocalDpi xmlns:a14="http://schemas.microsoft.com/office/drawing/2010/main" val="0"/>
+              </a:ext>
+            </a:extLst>
+          </a:blip>
+          <a:stretch>
+            <a:fillRect/>
+          </a:stretch>
+        </p:blipFill>
+        <p:spPr>
+          <a:xfrm>
+            <a:off x="10172020" y="5123136"/>
+            <a:ext cx="604636" cy="598983"/>
+          </a:xfrm>
+          <a:prstGeom prst="rect">
+            <a:avLst/>
+          </a:prstGeom>
+        </p:spPr>
+      </p:pic>
+      <p:pic>
+        <p:nvPicPr>
+          <p:cNvPr id="12" name="Picture 11">
+            <a:extLst>
+              <a:ext uri="{FF2B5EF4-FFF2-40B4-BE49-F238E27FC236}">
+                <a16:creationId xmlns:a16="http://schemas.microsoft.com/office/drawing/2014/main" id="{1D0F4DE7-F73F-1E29-0A2E-C629727C819D}"/>
+              </a:ext>
+            </a:extLst>
+          </p:cNvPr>
+          <p:cNvPicPr>
+            <a:picLocks noChangeAspect="1"/>
+          </p:cNvPicPr>
+          <p:nvPr/>
+        </p:nvPicPr>
+        <p:blipFill>
+          <a:blip r:embed="rId6">
+            <a:extLst>
+              <a:ext uri="{28A0092B-C50C-407E-A947-70E740481C1C}">
+                <a14:useLocalDpi xmlns:a14="http://schemas.microsoft.com/office/drawing/2010/main" val="0"/>
+              </a:ext>
+            </a:extLst>
+          </a:blip>
+          <a:stretch>
+            <a:fillRect/>
+          </a:stretch>
+        </p:blipFill>
+        <p:spPr>
+          <a:xfrm>
+            <a:off x="9434103" y="5108750"/>
+            <a:ext cx="604636" cy="614684"/>
+          </a:xfrm>
+          <a:prstGeom prst="rect">
+            <a:avLst/>
+          </a:prstGeom>
+        </p:spPr>
+      </p:pic>
+      <p:pic>
+        <p:nvPicPr>
+          <p:cNvPr id="15" name="Picture 14">
+            <a:extLst>
+              <a:ext uri="{FF2B5EF4-FFF2-40B4-BE49-F238E27FC236}">
+                <a16:creationId xmlns:a16="http://schemas.microsoft.com/office/drawing/2014/main" id="{8A5B2577-E2C5-9DEE-9EFD-7128018BE308}"/>
+              </a:ext>
+            </a:extLst>
+          </p:cNvPr>
+          <p:cNvPicPr>
+            <a:picLocks noChangeAspect="1"/>
+          </p:cNvPicPr>
+          <p:nvPr/>
+        </p:nvPicPr>
+        <p:blipFill>
+          <a:blip r:embed="rId7">
+            <a:extLst>
+              <a:ext uri="{28A0092B-C50C-407E-A947-70E740481C1C}">
+                <a14:useLocalDpi xmlns:a14="http://schemas.microsoft.com/office/drawing/2010/main" val="0"/>
+              </a:ext>
+            </a:extLst>
+          </a:blip>
+          <a:stretch>
+            <a:fillRect/>
+          </a:stretch>
+        </p:blipFill>
+        <p:spPr>
+          <a:xfrm>
+            <a:off x="8628942" y="5118797"/>
+            <a:ext cx="604636" cy="604636"/>
+          </a:xfrm>
+          <a:prstGeom prst="rect">
+            <a:avLst/>
+          </a:prstGeom>
+        </p:spPr>
+      </p:pic>
+      <p:pic>
+        <p:nvPicPr>
+          <p:cNvPr id="17" name="Picture 16">
+            <a:extLst>
+              <a:ext uri="{FF2B5EF4-FFF2-40B4-BE49-F238E27FC236}">
+                <a16:creationId xmlns:a16="http://schemas.microsoft.com/office/drawing/2014/main" id="{3BF4C5EA-8758-053E-3412-A0C5C16408A6}"/>
+              </a:ext>
+            </a:extLst>
+          </p:cNvPr>
+          <p:cNvPicPr>
+            <a:picLocks noChangeAspect="1"/>
+          </p:cNvPicPr>
+          <p:nvPr/>
+        </p:nvPicPr>
+        <p:blipFill>
+          <a:blip r:embed="rId8"/>
+          <a:stretch>
+            <a:fillRect/>
+          </a:stretch>
+        </p:blipFill>
+        <p:spPr>
+          <a:xfrm>
+            <a:off x="8712838" y="5242502"/>
+            <a:ext cx="380349" cy="380349"/>
+          </a:xfrm>
+          <a:prstGeom prst="rect">
+            <a:avLst/>
+          </a:prstGeom>
+        </p:spPr>
+      </p:pic>
+      <p:pic>
+        <p:nvPicPr>
+          <p:cNvPr id="19" name="Picture 18">
+            <a:extLst>
+              <a:ext uri="{FF2B5EF4-FFF2-40B4-BE49-F238E27FC236}">
+                <a16:creationId xmlns:a16="http://schemas.microsoft.com/office/drawing/2014/main" id="{1A05228D-E21C-694E-02AA-7E5CBD8EEFA8}"/>
+              </a:ext>
+            </a:extLst>
+          </p:cNvPr>
+          <p:cNvPicPr>
+            <a:picLocks noChangeAspect="1"/>
+          </p:cNvPicPr>
+          <p:nvPr/>
+        </p:nvPicPr>
+        <p:blipFill>
+          <a:blip r:embed="rId9"/>
+          <a:stretch>
+            <a:fillRect/>
+          </a:stretch>
+        </p:blipFill>
+        <p:spPr>
+          <a:xfrm>
+            <a:off x="9490562" y="5218275"/>
+            <a:ext cx="491717" cy="395634"/>
+          </a:xfrm>
+          <a:prstGeom prst="rect">
+            <a:avLst/>
+          </a:prstGeom>
+        </p:spPr>
+      </p:pic>
+      <p:pic>
+        <p:nvPicPr>
+          <p:cNvPr id="21" name="Picture 20">
+            <a:extLst>
+              <a:ext uri="{FF2B5EF4-FFF2-40B4-BE49-F238E27FC236}">
+                <a16:creationId xmlns:a16="http://schemas.microsoft.com/office/drawing/2014/main" id="{AFE3ECA7-7390-00C1-167A-E2C4BAE5C190}"/>
+              </a:ext>
+            </a:extLst>
+          </p:cNvPr>
+          <p:cNvPicPr>
+            <a:picLocks noChangeAspect="1"/>
+          </p:cNvPicPr>
+          <p:nvPr/>
+        </p:nvPicPr>
+        <p:blipFill>
+          <a:blip r:embed="rId10"/>
+          <a:stretch>
+            <a:fillRect/>
+          </a:stretch>
+        </p:blipFill>
+        <p:spPr>
+          <a:xfrm>
+            <a:off x="10203780" y="5240687"/>
+            <a:ext cx="548177" cy="340759"/>
+          </a:xfrm>
+          <a:prstGeom prst="rect">
+            <a:avLst/>
+          </a:prstGeom>
+        </p:spPr>
+      </p:pic>
+      <p:pic>
+        <p:nvPicPr>
+          <p:cNvPr id="23" name="Picture 22">
+            <a:extLst>
+              <a:ext uri="{FF2B5EF4-FFF2-40B4-BE49-F238E27FC236}">
+                <a16:creationId xmlns:a16="http://schemas.microsoft.com/office/drawing/2014/main" id="{4A39AAAD-834E-AFA0-16F6-35F664CD7ED2}"/>
+              </a:ext>
+            </a:extLst>
+          </p:cNvPr>
+          <p:cNvPicPr>
+            <a:picLocks noChangeAspect="1"/>
+          </p:cNvPicPr>
+          <p:nvPr/>
+        </p:nvPicPr>
+        <p:blipFill>
+          <a:blip r:embed="rId11"/>
+          <a:stretch>
+            <a:fillRect/>
+          </a:stretch>
+        </p:blipFill>
+        <p:spPr>
+          <a:xfrm>
+            <a:off x="11016796" y="5155667"/>
+            <a:ext cx="376544" cy="486370"/>
+          </a:xfrm>
+          <a:prstGeom prst="rect">
+            <a:avLst/>
+          </a:prstGeom>
+        </p:spPr>
+      </p:pic>
     </p:spTree>
     <p:extLst>
       <p:ext uri="{BB962C8B-B14F-4D97-AF65-F5344CB8AC3E}">
@@ -4890,14 +5842,14 @@
           <p:nvPr>
             <p:extLst>
               <p:ext uri="{D42A27DB-BD31-4B8C-83A1-F6EECF244321}">
-                <p14:modId xmlns:p14="http://schemas.microsoft.com/office/powerpoint/2010/main" val="926944933"/>
+                <p14:modId xmlns:p14="http://schemas.microsoft.com/office/powerpoint/2010/main" val="3401678367"/>
               </p:ext>
             </p:extLst>
           </p:nvPr>
         </p:nvGraphicFramePr>
         <p:xfrm>
-          <a:off x="734028" y="1215341"/>
-          <a:ext cx="10515600" cy="4663440"/>
+          <a:off x="843756" y="731520"/>
+          <a:ext cx="10251821" cy="5394960"/>
         </p:xfrm>
         <a:graphic>
           <a:graphicData uri="http://schemas.openxmlformats.org/drawingml/2006/table">
@@ -4906,7 +5858,7 @@
                 <a:tableStyleId>{5C22544A-7EE6-4342-B048-85BDC9FD1C3A}</a:tableStyleId>
               </a:tblPr>
               <a:tblGrid>
-                <a:gridCol w="3505200">
+                <a:gridCol w="3241421">
                   <a:extLst>
                     <a:ext uri="{9D8B030D-6E8A-4147-A177-3AD203B41FA5}">
                       <a16:colId xmlns:a16="http://schemas.microsoft.com/office/drawing/2014/main" val="2544330988"/>
@@ -5020,10 +5972,13 @@
                       <a:pPr>
                         <a:buNone/>
                       </a:pPr>
-                      <a:r>
-                        <a:rPr lang="en-AU" sz="2400"/>
-                        <a:t>No clear difference</a:t>
-                      </a:r>
+                      <a:endParaRPr lang="en-AU" sz="2400" dirty="0"/>
+                    </a:p>
+                    <a:p>
+                      <a:pPr>
+                        <a:buNone/>
+                      </a:pPr>
+                      <a:endParaRPr lang="en-AU" sz="2400" dirty="0"/>
                     </a:p>
                   </a:txBody>
                   <a:tcPr anchor="ctr"/>
@@ -5036,10 +5991,7 @@
                       <a:pPr>
                         <a:buNone/>
                       </a:pPr>
-                      <a:r>
-                        <a:rPr lang="en-AU" sz="2400"/>
-                        <a:t>No clear difference</a:t>
-                      </a:r>
+                      <a:endParaRPr lang="en-AU" sz="2400" dirty="0"/>
                     </a:p>
                   </a:txBody>
                   <a:tcPr anchor="ctr"/>
@@ -5075,10 +6027,13 @@
                       <a:pPr>
                         <a:buNone/>
                       </a:pPr>
-                      <a:r>
-                        <a:rPr lang="en-AU" sz="2400"/>
-                        <a:t>TM &gt; TMd21 &gt; SOL &gt; IC</a:t>
-                      </a:r>
+                      <a:endParaRPr lang="en-AU" sz="2400" dirty="0"/>
+                    </a:p>
+                    <a:p>
+                      <a:pPr>
+                        <a:buNone/>
+                      </a:pPr>
+                      <a:endParaRPr lang="en-AU" sz="2400" dirty="0"/>
                     </a:p>
                   </a:txBody>
                   <a:tcPr anchor="ctr"/>
@@ -5091,10 +6046,7 @@
                       <a:pPr>
                         <a:buNone/>
                       </a:pPr>
-                      <a:r>
-                        <a:rPr lang="en-AU" sz="2400"/>
-                        <a:t>TM &gt; IC &gt; TMd21 &gt; SOL</a:t>
-                      </a:r>
+                      <a:endParaRPr lang="en-AU" sz="2400" dirty="0"/>
                     </a:p>
                   </a:txBody>
                   <a:tcPr anchor="ctr"/>
@@ -5130,10 +6082,7 @@
                       <a:pPr>
                         <a:buNone/>
                       </a:pPr>
-                      <a:r>
-                        <a:rPr lang="en-AU" sz="2400" dirty="0"/>
-                        <a:t>Biphasic decay; : TM &gt; TMd21 ≈ SOL &gt; IC</a:t>
-                      </a:r>
+                      <a:endParaRPr lang="en-AU" sz="2400" dirty="0"/>
                     </a:p>
                   </a:txBody>
                   <a:tcPr anchor="ctr"/>
@@ -5146,10 +6095,13 @@
                       <a:pPr>
                         <a:buNone/>
                       </a:pPr>
-                      <a:r>
-                        <a:rPr lang="en-AU" sz="2400" dirty="0"/>
-                        <a:t>Biphasic decay; similar overall</a:t>
-                      </a:r>
+                      <a:endParaRPr lang="en-AU" sz="2400" dirty="0"/>
+                    </a:p>
+                    <a:p>
+                      <a:pPr>
+                        <a:buNone/>
+                      </a:pPr>
+                      <a:endParaRPr lang="en-AU" sz="2400" dirty="0"/>
                     </a:p>
                   </a:txBody>
                   <a:tcPr anchor="ctr"/>
@@ -5185,10 +6137,7 @@
                       <a:pPr>
                         <a:buNone/>
                       </a:pPr>
-                      <a:r>
-                        <a:rPr lang="en-AU" sz="2400" dirty="0"/>
-                        <a:t>CD44⁺CD62L⁻: TM &gt; TMd21 &gt; SOL &gt; IC</a:t>
-                      </a:r>
+                      <a:endParaRPr lang="en-AU" sz="2400" dirty="0"/>
                     </a:p>
                   </a:txBody>
                   <a:tcPr anchor="ctr"/>
@@ -5201,10 +6150,13 @@
                       <a:pPr>
                         <a:buNone/>
                       </a:pPr>
-                      <a:r>
-                        <a:rPr lang="en-AU" sz="2400" dirty="0"/>
-                        <a:t>KLRG1⁺CD127⁻: TM &gt; TMd21 &gt; SOL ≈ IC</a:t>
-                      </a:r>
+                      <a:endParaRPr lang="en-AU" sz="2400" dirty="0"/>
+                    </a:p>
+                    <a:p>
+                      <a:pPr>
+                        <a:buNone/>
+                      </a:pPr>
+                      <a:endParaRPr lang="en-AU" sz="2400" dirty="0"/>
                     </a:p>
                   </a:txBody>
                   <a:tcPr anchor="ctr"/>
@@ -5240,10 +6192,7 @@
                       <a:pPr>
                         <a:buNone/>
                       </a:pPr>
-                      <a:r>
-                        <a:rPr lang="en-AU" sz="2400"/>
-                        <a:t>TM &gt; TMd21 &gt; SOL &gt; IC</a:t>
-                      </a:r>
+                      <a:endParaRPr lang="en-AU" sz="2400" dirty="0"/>
                     </a:p>
                   </a:txBody>
                   <a:tcPr anchor="ctr"/>
@@ -5256,10 +6205,13 @@
                       <a:pPr>
                         <a:buNone/>
                       </a:pPr>
-                      <a:r>
-                        <a:rPr lang="en-AU" sz="2400" dirty="0"/>
-                        <a:t>TM highest; other groups uncertain (similar)</a:t>
-                      </a:r>
+                      <a:endParaRPr lang="en-AU" sz="2400" dirty="0"/>
+                    </a:p>
+                    <a:p>
+                      <a:pPr>
+                        <a:buNone/>
+                      </a:pPr>
+                      <a:endParaRPr lang="en-AU" sz="2400" dirty="0"/>
                     </a:p>
                   </a:txBody>
                   <a:tcPr anchor="ctr"/>
@@ -5295,10 +6247,13 @@
                       <a:pPr>
                         <a:buNone/>
                       </a:pPr>
-                      <a:r>
-                        <a:rPr lang="en-AU" sz="2400" dirty="0"/>
-                        <a:t>Biphasic decay: TM &gt; SOL &gt; TMd21 &gt; IC</a:t>
-                      </a:r>
+                      <a:endParaRPr lang="en-AU" sz="2400" dirty="0"/>
+                    </a:p>
+                    <a:p>
+                      <a:pPr>
+                        <a:buNone/>
+                      </a:pPr>
+                      <a:endParaRPr lang="en-AU" sz="2400" dirty="0"/>
                     </a:p>
                   </a:txBody>
                   <a:tcPr anchor="ctr"/>
@@ -5311,10 +6266,7 @@
                       <a:pPr>
                         <a:buNone/>
                       </a:pPr>
-                      <a:r>
-                        <a:rPr lang="en-AU" sz="2400" dirty="0"/>
-                        <a:t>Biphasic decay; possibly similar</a:t>
-                      </a:r>
+                      <a:endParaRPr lang="en-AU" sz="2400" dirty="0"/>
                     </a:p>
                   </a:txBody>
                   <a:tcPr anchor="ctr"/>
@@ -5329,6 +6281,366 @@
           </a:graphicData>
         </a:graphic>
       </p:graphicFrame>
+      <p:pic>
+        <p:nvPicPr>
+          <p:cNvPr id="3" name="Picture 2">
+            <a:extLst>
+              <a:ext uri="{FF2B5EF4-FFF2-40B4-BE49-F238E27FC236}">
+                <a16:creationId xmlns:a16="http://schemas.microsoft.com/office/drawing/2014/main" id="{1BC2F50E-24AA-7799-E979-80BB91847E6F}"/>
+              </a:ext>
+            </a:extLst>
+          </p:cNvPr>
+          <p:cNvPicPr>
+            <a:picLocks noChangeAspect="1"/>
+          </p:cNvPicPr>
+          <p:nvPr/>
+        </p:nvPicPr>
+        <p:blipFill>
+          <a:blip r:embed="rId3"/>
+          <a:stretch>
+            <a:fillRect/>
+          </a:stretch>
+        </p:blipFill>
+        <p:spPr>
+          <a:xfrm>
+            <a:off x="5004899" y="1280635"/>
+            <a:ext cx="1497780" cy="566387"/>
+          </a:xfrm>
+          <a:prstGeom prst="rect">
+            <a:avLst/>
+          </a:prstGeom>
+        </p:spPr>
+      </p:pic>
+      <p:pic>
+        <p:nvPicPr>
+          <p:cNvPr id="8" name="Picture 7">
+            <a:extLst>
+              <a:ext uri="{FF2B5EF4-FFF2-40B4-BE49-F238E27FC236}">
+                <a16:creationId xmlns:a16="http://schemas.microsoft.com/office/drawing/2014/main" id="{60742D16-B97F-C893-5E50-9AEA0384E31C}"/>
+              </a:ext>
+            </a:extLst>
+          </p:cNvPr>
+          <p:cNvPicPr>
+            <a:picLocks noChangeAspect="1"/>
+          </p:cNvPicPr>
+          <p:nvPr/>
+        </p:nvPicPr>
+        <p:blipFill>
+          <a:blip r:embed="rId3"/>
+          <a:stretch>
+            <a:fillRect/>
+          </a:stretch>
+        </p:blipFill>
+        <p:spPr>
+          <a:xfrm>
+            <a:off x="8390280" y="1237007"/>
+            <a:ext cx="1613152" cy="610015"/>
+          </a:xfrm>
+          <a:prstGeom prst="rect">
+            <a:avLst/>
+          </a:prstGeom>
+        </p:spPr>
+      </p:pic>
+      <p:pic>
+        <p:nvPicPr>
+          <p:cNvPr id="10" name="Picture 9">
+            <a:extLst>
+              <a:ext uri="{FF2B5EF4-FFF2-40B4-BE49-F238E27FC236}">
+                <a16:creationId xmlns:a16="http://schemas.microsoft.com/office/drawing/2014/main" id="{9240ED62-DFA0-4AA8-F504-E33FD55B0CC1}"/>
+              </a:ext>
+            </a:extLst>
+          </p:cNvPr>
+          <p:cNvPicPr>
+            <a:picLocks noChangeAspect="1"/>
+          </p:cNvPicPr>
+          <p:nvPr/>
+        </p:nvPicPr>
+        <p:blipFill>
+          <a:blip r:embed="rId3"/>
+          <a:stretch>
+            <a:fillRect/>
+          </a:stretch>
+        </p:blipFill>
+        <p:spPr>
+          <a:xfrm>
+            <a:off x="8390280" y="5414027"/>
+            <a:ext cx="1626014" cy="614879"/>
+          </a:xfrm>
+          <a:prstGeom prst="rect">
+            <a:avLst/>
+          </a:prstGeom>
+        </p:spPr>
+      </p:pic>
+      <p:pic>
+        <p:nvPicPr>
+          <p:cNvPr id="12" name="Picture 11">
+            <a:extLst>
+              <a:ext uri="{FF2B5EF4-FFF2-40B4-BE49-F238E27FC236}">
+                <a16:creationId xmlns:a16="http://schemas.microsoft.com/office/drawing/2014/main" id="{D0A21484-767B-8BD0-608B-45A46FB34CFB}"/>
+              </a:ext>
+            </a:extLst>
+          </p:cNvPr>
+          <p:cNvPicPr>
+            <a:picLocks noChangeAspect="1"/>
+          </p:cNvPicPr>
+          <p:nvPr/>
+        </p:nvPicPr>
+        <p:blipFill>
+          <a:blip r:embed="rId4"/>
+          <a:stretch>
+            <a:fillRect/>
+          </a:stretch>
+        </p:blipFill>
+        <p:spPr>
+          <a:xfrm>
+            <a:off x="5004899" y="2113886"/>
+            <a:ext cx="1529780" cy="643959"/>
+          </a:xfrm>
+          <a:prstGeom prst="rect">
+            <a:avLst/>
+          </a:prstGeom>
+        </p:spPr>
+      </p:pic>
+      <p:pic>
+        <p:nvPicPr>
+          <p:cNvPr id="14" name="Picture 13">
+            <a:extLst>
+              <a:ext uri="{FF2B5EF4-FFF2-40B4-BE49-F238E27FC236}">
+                <a16:creationId xmlns:a16="http://schemas.microsoft.com/office/drawing/2014/main" id="{3A67E451-A50A-C040-4215-99138FB0E638}"/>
+              </a:ext>
+            </a:extLst>
+          </p:cNvPr>
+          <p:cNvPicPr>
+            <a:picLocks noChangeAspect="1"/>
+          </p:cNvPicPr>
+          <p:nvPr/>
+        </p:nvPicPr>
+        <p:blipFill>
+          <a:blip r:embed="rId4"/>
+          <a:stretch>
+            <a:fillRect/>
+          </a:stretch>
+        </p:blipFill>
+        <p:spPr>
+          <a:xfrm>
+            <a:off x="5004899" y="2945179"/>
+            <a:ext cx="1529780" cy="643959"/>
+          </a:xfrm>
+          <a:prstGeom prst="rect">
+            <a:avLst/>
+          </a:prstGeom>
+        </p:spPr>
+      </p:pic>
+      <p:pic>
+        <p:nvPicPr>
+          <p:cNvPr id="16" name="Picture 15">
+            <a:extLst>
+              <a:ext uri="{FF2B5EF4-FFF2-40B4-BE49-F238E27FC236}">
+                <a16:creationId xmlns:a16="http://schemas.microsoft.com/office/drawing/2014/main" id="{FF87416A-A787-C53E-4AFA-508F6A134281}"/>
+              </a:ext>
+            </a:extLst>
+          </p:cNvPr>
+          <p:cNvPicPr>
+            <a:picLocks noChangeAspect="1"/>
+          </p:cNvPicPr>
+          <p:nvPr/>
+        </p:nvPicPr>
+        <p:blipFill>
+          <a:blip r:embed="rId5"/>
+          <a:stretch>
+            <a:fillRect/>
+          </a:stretch>
+        </p:blipFill>
+        <p:spPr>
+          <a:xfrm>
+            <a:off x="4968323" y="3742329"/>
+            <a:ext cx="1715228" cy="719607"/>
+          </a:xfrm>
+          <a:prstGeom prst="rect">
+            <a:avLst/>
+          </a:prstGeom>
+        </p:spPr>
+      </p:pic>
+      <p:pic>
+        <p:nvPicPr>
+          <p:cNvPr id="18" name="Picture 17">
+            <a:extLst>
+              <a:ext uri="{FF2B5EF4-FFF2-40B4-BE49-F238E27FC236}">
+                <a16:creationId xmlns:a16="http://schemas.microsoft.com/office/drawing/2014/main" id="{8F9371B9-AA81-7425-53E8-AB99545C04CF}"/>
+              </a:ext>
+            </a:extLst>
+          </p:cNvPr>
+          <p:cNvPicPr>
+            <a:picLocks noChangeAspect="1"/>
+          </p:cNvPicPr>
+          <p:nvPr/>
+        </p:nvPicPr>
+        <p:blipFill>
+          <a:blip r:embed="rId6"/>
+          <a:stretch>
+            <a:fillRect/>
+          </a:stretch>
+        </p:blipFill>
+        <p:spPr>
+          <a:xfrm>
+            <a:off x="4977467" y="4561235"/>
+            <a:ext cx="1715228" cy="708961"/>
+          </a:xfrm>
+          <a:prstGeom prst="rect">
+            <a:avLst/>
+          </a:prstGeom>
+        </p:spPr>
+      </p:pic>
+      <p:pic>
+        <p:nvPicPr>
+          <p:cNvPr id="20" name="Picture 19">
+            <a:extLst>
+              <a:ext uri="{FF2B5EF4-FFF2-40B4-BE49-F238E27FC236}">
+                <a16:creationId xmlns:a16="http://schemas.microsoft.com/office/drawing/2014/main" id="{00B21897-8448-A657-8C04-918C037D914D}"/>
+              </a:ext>
+            </a:extLst>
+          </p:cNvPr>
+          <p:cNvPicPr>
+            <a:picLocks noChangeAspect="1"/>
+          </p:cNvPicPr>
+          <p:nvPr/>
+        </p:nvPicPr>
+        <p:blipFill>
+          <a:blip r:embed="rId7"/>
+          <a:stretch>
+            <a:fillRect/>
+          </a:stretch>
+        </p:blipFill>
+        <p:spPr>
+          <a:xfrm>
+            <a:off x="4977467" y="5370798"/>
+            <a:ext cx="1706084" cy="683081"/>
+          </a:xfrm>
+          <a:prstGeom prst="rect">
+            <a:avLst/>
+          </a:prstGeom>
+        </p:spPr>
+      </p:pic>
+      <p:pic>
+        <p:nvPicPr>
+          <p:cNvPr id="22" name="Picture 21">
+            <a:extLst>
+              <a:ext uri="{FF2B5EF4-FFF2-40B4-BE49-F238E27FC236}">
+                <a16:creationId xmlns:a16="http://schemas.microsoft.com/office/drawing/2014/main" id="{242AA3B1-8A34-9981-CC4C-46932530C19F}"/>
+              </a:ext>
+            </a:extLst>
+          </p:cNvPr>
+          <p:cNvPicPr>
+            <a:picLocks noChangeAspect="1"/>
+          </p:cNvPicPr>
+          <p:nvPr/>
+        </p:nvPicPr>
+        <p:blipFill>
+          <a:blip r:embed="rId3"/>
+          <a:stretch>
+            <a:fillRect/>
+          </a:stretch>
+        </p:blipFill>
+        <p:spPr>
+          <a:xfrm>
+            <a:off x="8390280" y="2945179"/>
+            <a:ext cx="1626014" cy="614879"/>
+          </a:xfrm>
+          <a:prstGeom prst="rect">
+            <a:avLst/>
+          </a:prstGeom>
+        </p:spPr>
+      </p:pic>
+      <p:pic>
+        <p:nvPicPr>
+          <p:cNvPr id="24" name="Picture 23">
+            <a:extLst>
+              <a:ext uri="{FF2B5EF4-FFF2-40B4-BE49-F238E27FC236}">
+                <a16:creationId xmlns:a16="http://schemas.microsoft.com/office/drawing/2014/main" id="{A5A0B82A-7381-330E-C8C3-24767FC6A612}"/>
+              </a:ext>
+            </a:extLst>
+          </p:cNvPr>
+          <p:cNvPicPr>
+            <a:picLocks noChangeAspect="1"/>
+          </p:cNvPicPr>
+          <p:nvPr/>
+        </p:nvPicPr>
+        <p:blipFill>
+          <a:blip r:embed="rId8"/>
+          <a:stretch>
+            <a:fillRect/>
+          </a:stretch>
+        </p:blipFill>
+        <p:spPr>
+          <a:xfrm>
+            <a:off x="8348386" y="4533803"/>
+            <a:ext cx="1715228" cy="700494"/>
+          </a:xfrm>
+          <a:prstGeom prst="rect">
+            <a:avLst/>
+          </a:prstGeom>
+        </p:spPr>
+      </p:pic>
+      <p:pic>
+        <p:nvPicPr>
+          <p:cNvPr id="26" name="Picture 25">
+            <a:extLst>
+              <a:ext uri="{FF2B5EF4-FFF2-40B4-BE49-F238E27FC236}">
+                <a16:creationId xmlns:a16="http://schemas.microsoft.com/office/drawing/2014/main" id="{BF8D6AF2-B153-E2E5-D81E-6CD59D34D454}"/>
+              </a:ext>
+            </a:extLst>
+          </p:cNvPr>
+          <p:cNvPicPr>
+            <a:picLocks noChangeAspect="1"/>
+          </p:cNvPicPr>
+          <p:nvPr/>
+        </p:nvPicPr>
+        <p:blipFill>
+          <a:blip r:embed="rId9"/>
+          <a:stretch>
+            <a:fillRect/>
+          </a:stretch>
+        </p:blipFill>
+        <p:spPr>
+          <a:xfrm>
+            <a:off x="8348386" y="2069464"/>
+            <a:ext cx="1715228" cy="660426"/>
+          </a:xfrm>
+          <a:prstGeom prst="rect">
+            <a:avLst/>
+          </a:prstGeom>
+        </p:spPr>
+      </p:pic>
+      <p:pic>
+        <p:nvPicPr>
+          <p:cNvPr id="28" name="Picture 27">
+            <a:extLst>
+              <a:ext uri="{FF2B5EF4-FFF2-40B4-BE49-F238E27FC236}">
+                <a16:creationId xmlns:a16="http://schemas.microsoft.com/office/drawing/2014/main" id="{1F4F2735-D47E-69F1-2E8D-42A138C6C06A}"/>
+              </a:ext>
+            </a:extLst>
+          </p:cNvPr>
+          <p:cNvPicPr>
+            <a:picLocks noChangeAspect="1"/>
+          </p:cNvPicPr>
+          <p:nvPr/>
+        </p:nvPicPr>
+        <p:blipFill>
+          <a:blip r:embed="rId10"/>
+          <a:stretch>
+            <a:fillRect/>
+          </a:stretch>
+        </p:blipFill>
+        <p:spPr>
+          <a:xfrm>
+            <a:off x="8348387" y="3725379"/>
+            <a:ext cx="1671804" cy="660426"/>
+          </a:xfrm>
+          <a:prstGeom prst="rect">
+            <a:avLst/>
+          </a:prstGeom>
+        </p:spPr>
+      </p:pic>
     </p:spTree>
     <p:extLst>
       <p:ext uri="{BB962C8B-B14F-4D97-AF65-F5344CB8AC3E}">
@@ -5359,6 +6671,42 @@
           <a:chExt cx="0" cy="0"/>
         </a:xfrm>
       </p:grpSpPr>
+      <p:pic>
+        <p:nvPicPr>
+          <p:cNvPr id="7" name="Picture 6">
+            <a:extLst>
+              <a:ext uri="{FF2B5EF4-FFF2-40B4-BE49-F238E27FC236}">
+                <a16:creationId xmlns:a16="http://schemas.microsoft.com/office/drawing/2014/main" id="{F7DB997F-8280-CFA9-BAEA-A34A6C8A09A5}"/>
+              </a:ext>
+            </a:extLst>
+          </p:cNvPr>
+          <p:cNvPicPr>
+            <a:picLocks noChangeAspect="1"/>
+          </p:cNvPicPr>
+          <p:nvPr/>
+        </p:nvPicPr>
+        <p:blipFill>
+          <a:blip r:embed="rId2">
+            <a:extLst>
+              <a:ext uri="{28A0092B-C50C-407E-A947-70E740481C1C}">
+                <a14:useLocalDpi xmlns:a14="http://schemas.microsoft.com/office/drawing/2010/main" val="0"/>
+              </a:ext>
+            </a:extLst>
+          </a:blip>
+          <a:stretch>
+            <a:fillRect/>
+          </a:stretch>
+        </p:blipFill>
+        <p:spPr>
+          <a:xfrm>
+            <a:off x="493376" y="1371589"/>
+            <a:ext cx="7315215" cy="5486411"/>
+          </a:xfrm>
+          <a:prstGeom prst="rect">
+            <a:avLst/>
+          </a:prstGeom>
+        </p:spPr>
+      </p:pic>
       <p:sp>
         <p:nvSpPr>
           <p:cNvPr id="2" name="Title 1">
@@ -5387,42 +6735,6 @@
           </a:p>
         </p:txBody>
       </p:sp>
-      <p:pic>
-        <p:nvPicPr>
-          <p:cNvPr id="5" name="Picture 4">
-            <a:extLst>
-              <a:ext uri="{FF2B5EF4-FFF2-40B4-BE49-F238E27FC236}">
-                <a16:creationId xmlns:a16="http://schemas.microsoft.com/office/drawing/2014/main" id="{C485B579-AB08-EC8D-0BE4-4DC1B97A2BEE}"/>
-              </a:ext>
-            </a:extLst>
-          </p:cNvPr>
-          <p:cNvPicPr>
-            <a:picLocks noChangeAspect="1"/>
-          </p:cNvPicPr>
-          <p:nvPr/>
-        </p:nvPicPr>
-        <p:blipFill>
-          <a:blip r:embed="rId2">
-            <a:extLst>
-              <a:ext uri="{28A0092B-C50C-407E-A947-70E740481C1C}">
-                <a14:useLocalDpi xmlns:a14="http://schemas.microsoft.com/office/drawing/2010/main" val="0"/>
-              </a:ext>
-            </a:extLst>
-          </a:blip>
-          <a:stretch>
-            <a:fillRect/>
-          </a:stretch>
-        </p:blipFill>
-        <p:spPr>
-          <a:xfrm>
-            <a:off x="963553" y="1369131"/>
-            <a:ext cx="7315215" cy="5486411"/>
-          </a:xfrm>
-          <a:prstGeom prst="rect">
-            <a:avLst/>
-          </a:prstGeom>
-        </p:spPr>
-      </p:pic>
       <p:sp>
         <p:nvSpPr>
           <p:cNvPr id="9" name="TextBox 8">
@@ -5437,7 +6749,7 @@
         </p:nvSpPr>
         <p:spPr>
           <a:xfrm>
-            <a:off x="2025445" y="5711279"/>
+            <a:off x="1385365" y="5619839"/>
             <a:ext cx="6096000" cy="461665"/>
           </a:xfrm>
           <a:prstGeom prst="rect">
@@ -5472,6 +6784,270 @@
           </a:p>
         </p:txBody>
       </p:sp>
+      <p:pic>
+        <p:nvPicPr>
+          <p:cNvPr id="22" name="Picture 21">
+            <a:extLst>
+              <a:ext uri="{FF2B5EF4-FFF2-40B4-BE49-F238E27FC236}">
+                <a16:creationId xmlns:a16="http://schemas.microsoft.com/office/drawing/2014/main" id="{DE79A48A-6A84-75AE-C9F3-411530654F6E}"/>
+              </a:ext>
+            </a:extLst>
+          </p:cNvPr>
+          <p:cNvPicPr>
+            <a:picLocks noChangeAspect="1"/>
+          </p:cNvPicPr>
+          <p:nvPr/>
+        </p:nvPicPr>
+        <p:blipFill>
+          <a:blip r:embed="rId3">
+            <a:extLst>
+              <a:ext uri="{28A0092B-C50C-407E-A947-70E740481C1C}">
+                <a14:useLocalDpi xmlns:a14="http://schemas.microsoft.com/office/drawing/2010/main" val="0"/>
+              </a:ext>
+            </a:extLst>
+          </a:blip>
+          <a:stretch>
+            <a:fillRect/>
+          </a:stretch>
+        </p:blipFill>
+        <p:spPr>
+          <a:xfrm>
+            <a:off x="10509494" y="2138706"/>
+            <a:ext cx="604636" cy="604636"/>
+          </a:xfrm>
+          <a:prstGeom prst="rect">
+            <a:avLst/>
+          </a:prstGeom>
+        </p:spPr>
+      </p:pic>
+      <p:pic>
+        <p:nvPicPr>
+          <p:cNvPr id="24" name="Picture 23">
+            <a:extLst>
+              <a:ext uri="{FF2B5EF4-FFF2-40B4-BE49-F238E27FC236}">
+                <a16:creationId xmlns:a16="http://schemas.microsoft.com/office/drawing/2014/main" id="{D564A01C-5EE5-74D4-A153-E5C57EF9893C}"/>
+              </a:ext>
+            </a:extLst>
+          </p:cNvPr>
+          <p:cNvPicPr>
+            <a:picLocks noChangeAspect="1"/>
+          </p:cNvPicPr>
+          <p:nvPr/>
+        </p:nvPicPr>
+        <p:blipFill>
+          <a:blip r:embed="rId4">
+            <a:extLst>
+              <a:ext uri="{28A0092B-C50C-407E-A947-70E740481C1C}">
+                <a14:useLocalDpi xmlns:a14="http://schemas.microsoft.com/office/drawing/2010/main" val="0"/>
+              </a:ext>
+            </a:extLst>
+          </a:blip>
+          <a:stretch>
+            <a:fillRect/>
+          </a:stretch>
+        </p:blipFill>
+        <p:spPr>
+          <a:xfrm>
+            <a:off x="9771577" y="2153092"/>
+            <a:ext cx="604636" cy="598983"/>
+          </a:xfrm>
+          <a:prstGeom prst="rect">
+            <a:avLst/>
+          </a:prstGeom>
+        </p:spPr>
+      </p:pic>
+      <p:pic>
+        <p:nvPicPr>
+          <p:cNvPr id="26" name="Picture 25">
+            <a:extLst>
+              <a:ext uri="{FF2B5EF4-FFF2-40B4-BE49-F238E27FC236}">
+                <a16:creationId xmlns:a16="http://schemas.microsoft.com/office/drawing/2014/main" id="{12BA3F15-A6A4-8A46-1DDC-4B5FFD8870C2}"/>
+              </a:ext>
+            </a:extLst>
+          </p:cNvPr>
+          <p:cNvPicPr>
+            <a:picLocks noChangeAspect="1"/>
+          </p:cNvPicPr>
+          <p:nvPr/>
+        </p:nvPicPr>
+        <p:blipFill>
+          <a:blip r:embed="rId5">
+            <a:extLst>
+              <a:ext uri="{28A0092B-C50C-407E-A947-70E740481C1C}">
+                <a14:useLocalDpi xmlns:a14="http://schemas.microsoft.com/office/drawing/2010/main" val="0"/>
+              </a:ext>
+            </a:extLst>
+          </a:blip>
+          <a:stretch>
+            <a:fillRect/>
+          </a:stretch>
+        </p:blipFill>
+        <p:spPr>
+          <a:xfrm>
+            <a:off x="9033660" y="2138706"/>
+            <a:ext cx="604636" cy="614684"/>
+          </a:xfrm>
+          <a:prstGeom prst="rect">
+            <a:avLst/>
+          </a:prstGeom>
+        </p:spPr>
+      </p:pic>
+      <p:pic>
+        <p:nvPicPr>
+          <p:cNvPr id="28" name="Picture 27">
+            <a:extLst>
+              <a:ext uri="{FF2B5EF4-FFF2-40B4-BE49-F238E27FC236}">
+                <a16:creationId xmlns:a16="http://schemas.microsoft.com/office/drawing/2014/main" id="{184948AF-D8F8-5789-DE07-45BDF62267FC}"/>
+              </a:ext>
+            </a:extLst>
+          </p:cNvPr>
+          <p:cNvPicPr>
+            <a:picLocks noChangeAspect="1"/>
+          </p:cNvPicPr>
+          <p:nvPr/>
+        </p:nvPicPr>
+        <p:blipFill>
+          <a:blip r:embed="rId6">
+            <a:extLst>
+              <a:ext uri="{28A0092B-C50C-407E-A947-70E740481C1C}">
+                <a14:useLocalDpi xmlns:a14="http://schemas.microsoft.com/office/drawing/2010/main" val="0"/>
+              </a:ext>
+            </a:extLst>
+          </a:blip>
+          <a:stretch>
+            <a:fillRect/>
+          </a:stretch>
+        </p:blipFill>
+        <p:spPr>
+          <a:xfrm>
+            <a:off x="8228499" y="2148753"/>
+            <a:ext cx="604636" cy="604636"/>
+          </a:xfrm>
+          <a:prstGeom prst="rect">
+            <a:avLst/>
+          </a:prstGeom>
+        </p:spPr>
+      </p:pic>
+      <p:pic>
+        <p:nvPicPr>
+          <p:cNvPr id="30" name="Picture 29">
+            <a:extLst>
+              <a:ext uri="{FF2B5EF4-FFF2-40B4-BE49-F238E27FC236}">
+                <a16:creationId xmlns:a16="http://schemas.microsoft.com/office/drawing/2014/main" id="{AA4576A1-85CF-75B5-1F3F-CB3A9071AD49}"/>
+              </a:ext>
+            </a:extLst>
+          </p:cNvPr>
+          <p:cNvPicPr>
+            <a:picLocks noChangeAspect="1"/>
+          </p:cNvPicPr>
+          <p:nvPr/>
+        </p:nvPicPr>
+        <p:blipFill>
+          <a:blip r:embed="rId7"/>
+          <a:stretch>
+            <a:fillRect/>
+          </a:stretch>
+        </p:blipFill>
+        <p:spPr>
+          <a:xfrm>
+            <a:off x="8312395" y="2272458"/>
+            <a:ext cx="380349" cy="380349"/>
+          </a:xfrm>
+          <a:prstGeom prst="rect">
+            <a:avLst/>
+          </a:prstGeom>
+        </p:spPr>
+      </p:pic>
+      <p:pic>
+        <p:nvPicPr>
+          <p:cNvPr id="32" name="Picture 31">
+            <a:extLst>
+              <a:ext uri="{FF2B5EF4-FFF2-40B4-BE49-F238E27FC236}">
+                <a16:creationId xmlns:a16="http://schemas.microsoft.com/office/drawing/2014/main" id="{7EE5ED95-B563-7D79-CCBC-2B3B27D2B38F}"/>
+              </a:ext>
+            </a:extLst>
+          </p:cNvPr>
+          <p:cNvPicPr>
+            <a:picLocks noChangeAspect="1"/>
+          </p:cNvPicPr>
+          <p:nvPr/>
+        </p:nvPicPr>
+        <p:blipFill>
+          <a:blip r:embed="rId8"/>
+          <a:stretch>
+            <a:fillRect/>
+          </a:stretch>
+        </p:blipFill>
+        <p:spPr>
+          <a:xfrm>
+            <a:off x="9090119" y="2248231"/>
+            <a:ext cx="491717" cy="395634"/>
+          </a:xfrm>
+          <a:prstGeom prst="rect">
+            <a:avLst/>
+          </a:prstGeom>
+        </p:spPr>
+      </p:pic>
+      <p:pic>
+        <p:nvPicPr>
+          <p:cNvPr id="34" name="Picture 33">
+            <a:extLst>
+              <a:ext uri="{FF2B5EF4-FFF2-40B4-BE49-F238E27FC236}">
+                <a16:creationId xmlns:a16="http://schemas.microsoft.com/office/drawing/2014/main" id="{8D8D9831-2D6E-C257-D04F-A463ACC7FAC9}"/>
+              </a:ext>
+            </a:extLst>
+          </p:cNvPr>
+          <p:cNvPicPr>
+            <a:picLocks noChangeAspect="1"/>
+          </p:cNvPicPr>
+          <p:nvPr/>
+        </p:nvPicPr>
+        <p:blipFill>
+          <a:blip r:embed="rId9"/>
+          <a:stretch>
+            <a:fillRect/>
+          </a:stretch>
+        </p:blipFill>
+        <p:spPr>
+          <a:xfrm>
+            <a:off x="9803337" y="2270643"/>
+            <a:ext cx="548177" cy="340759"/>
+          </a:xfrm>
+          <a:prstGeom prst="rect">
+            <a:avLst/>
+          </a:prstGeom>
+        </p:spPr>
+      </p:pic>
+      <p:pic>
+        <p:nvPicPr>
+          <p:cNvPr id="36" name="Picture 35">
+            <a:extLst>
+              <a:ext uri="{FF2B5EF4-FFF2-40B4-BE49-F238E27FC236}">
+                <a16:creationId xmlns:a16="http://schemas.microsoft.com/office/drawing/2014/main" id="{82911BD4-288D-D7B1-9BFB-0AE39E291DC9}"/>
+              </a:ext>
+            </a:extLst>
+          </p:cNvPr>
+          <p:cNvPicPr>
+            <a:picLocks noChangeAspect="1"/>
+          </p:cNvPicPr>
+          <p:nvPr/>
+        </p:nvPicPr>
+        <p:blipFill>
+          <a:blip r:embed="rId10"/>
+          <a:stretch>
+            <a:fillRect/>
+          </a:stretch>
+        </p:blipFill>
+        <p:spPr>
+          <a:xfrm>
+            <a:off x="10616353" y="2185623"/>
+            <a:ext cx="376544" cy="486370"/>
+          </a:xfrm>
+          <a:prstGeom prst="rect">
+            <a:avLst/>
+          </a:prstGeom>
+        </p:spPr>
+      </p:pic>
     </p:spTree>
     <p:extLst>
       <p:ext uri="{BB962C8B-B14F-4D97-AF65-F5344CB8AC3E}">
@@ -5538,10 +7114,10 @@
       </p:sp>
       <p:pic>
         <p:nvPicPr>
-          <p:cNvPr id="4" name="Picture 3">
-            <a:extLst>
-              <a:ext uri="{FF2B5EF4-FFF2-40B4-BE49-F238E27FC236}">
-                <a16:creationId xmlns:a16="http://schemas.microsoft.com/office/drawing/2014/main" id="{FDBF23B3-D375-2114-D43D-1BA10947D89C}"/>
+          <p:cNvPr id="7" name="Picture 6">
+            <a:extLst>
+              <a:ext uri="{FF2B5EF4-FFF2-40B4-BE49-F238E27FC236}">
+                <a16:creationId xmlns:a16="http://schemas.microsoft.com/office/drawing/2014/main" id="{078BE2B5-F84A-1FB5-D515-17D89BC83162}"/>
               </a:ext>
             </a:extLst>
           </p:cNvPr>
@@ -5564,8 +7140,272 @@
         </p:blipFill>
         <p:spPr>
           <a:xfrm>
-            <a:off x="481773" y="1371589"/>
+            <a:off x="70338" y="1371589"/>
             <a:ext cx="7315215" cy="5486411"/>
+          </a:xfrm>
+          <a:prstGeom prst="rect">
+            <a:avLst/>
+          </a:prstGeom>
+        </p:spPr>
+      </p:pic>
+      <p:pic>
+        <p:nvPicPr>
+          <p:cNvPr id="17" name="Picture 16">
+            <a:extLst>
+              <a:ext uri="{FF2B5EF4-FFF2-40B4-BE49-F238E27FC236}">
+                <a16:creationId xmlns:a16="http://schemas.microsoft.com/office/drawing/2014/main" id="{B58B016C-B318-3EF4-998E-FD95D27F9D56}"/>
+              </a:ext>
+            </a:extLst>
+          </p:cNvPr>
+          <p:cNvPicPr>
+            <a:picLocks noChangeAspect="1"/>
+          </p:cNvPicPr>
+          <p:nvPr/>
+        </p:nvPicPr>
+        <p:blipFill>
+          <a:blip r:embed="rId3">
+            <a:extLst>
+              <a:ext uri="{28A0092B-C50C-407E-A947-70E740481C1C}">
+                <a14:useLocalDpi xmlns:a14="http://schemas.microsoft.com/office/drawing/2010/main" val="0"/>
+              </a:ext>
+            </a:extLst>
+          </a:blip>
+          <a:stretch>
+            <a:fillRect/>
+          </a:stretch>
+        </p:blipFill>
+        <p:spPr>
+          <a:xfrm>
+            <a:off x="10509494" y="2138706"/>
+            <a:ext cx="604636" cy="604636"/>
+          </a:xfrm>
+          <a:prstGeom prst="rect">
+            <a:avLst/>
+          </a:prstGeom>
+        </p:spPr>
+      </p:pic>
+      <p:pic>
+        <p:nvPicPr>
+          <p:cNvPr id="19" name="Picture 18">
+            <a:extLst>
+              <a:ext uri="{FF2B5EF4-FFF2-40B4-BE49-F238E27FC236}">
+                <a16:creationId xmlns:a16="http://schemas.microsoft.com/office/drawing/2014/main" id="{AB8AC86B-5D04-BDEE-9517-C3383114C145}"/>
+              </a:ext>
+            </a:extLst>
+          </p:cNvPr>
+          <p:cNvPicPr>
+            <a:picLocks noChangeAspect="1"/>
+          </p:cNvPicPr>
+          <p:nvPr/>
+        </p:nvPicPr>
+        <p:blipFill>
+          <a:blip r:embed="rId4">
+            <a:extLst>
+              <a:ext uri="{28A0092B-C50C-407E-A947-70E740481C1C}">
+                <a14:useLocalDpi xmlns:a14="http://schemas.microsoft.com/office/drawing/2010/main" val="0"/>
+              </a:ext>
+            </a:extLst>
+          </a:blip>
+          <a:stretch>
+            <a:fillRect/>
+          </a:stretch>
+        </p:blipFill>
+        <p:spPr>
+          <a:xfrm>
+            <a:off x="9771577" y="2153092"/>
+            <a:ext cx="604636" cy="598983"/>
+          </a:xfrm>
+          <a:prstGeom prst="rect">
+            <a:avLst/>
+          </a:prstGeom>
+        </p:spPr>
+      </p:pic>
+      <p:pic>
+        <p:nvPicPr>
+          <p:cNvPr id="21" name="Picture 20">
+            <a:extLst>
+              <a:ext uri="{FF2B5EF4-FFF2-40B4-BE49-F238E27FC236}">
+                <a16:creationId xmlns:a16="http://schemas.microsoft.com/office/drawing/2014/main" id="{03811D3E-B97A-C310-C56D-96D0003D8192}"/>
+              </a:ext>
+            </a:extLst>
+          </p:cNvPr>
+          <p:cNvPicPr>
+            <a:picLocks noChangeAspect="1"/>
+          </p:cNvPicPr>
+          <p:nvPr/>
+        </p:nvPicPr>
+        <p:blipFill>
+          <a:blip r:embed="rId5">
+            <a:extLst>
+              <a:ext uri="{28A0092B-C50C-407E-A947-70E740481C1C}">
+                <a14:useLocalDpi xmlns:a14="http://schemas.microsoft.com/office/drawing/2010/main" val="0"/>
+              </a:ext>
+            </a:extLst>
+          </a:blip>
+          <a:stretch>
+            <a:fillRect/>
+          </a:stretch>
+        </p:blipFill>
+        <p:spPr>
+          <a:xfrm>
+            <a:off x="9033660" y="2138706"/>
+            <a:ext cx="604636" cy="614684"/>
+          </a:xfrm>
+          <a:prstGeom prst="rect">
+            <a:avLst/>
+          </a:prstGeom>
+        </p:spPr>
+      </p:pic>
+      <p:pic>
+        <p:nvPicPr>
+          <p:cNvPr id="23" name="Picture 22">
+            <a:extLst>
+              <a:ext uri="{FF2B5EF4-FFF2-40B4-BE49-F238E27FC236}">
+                <a16:creationId xmlns:a16="http://schemas.microsoft.com/office/drawing/2014/main" id="{25399675-6357-90F7-3199-BFCB178187C8}"/>
+              </a:ext>
+            </a:extLst>
+          </p:cNvPr>
+          <p:cNvPicPr>
+            <a:picLocks noChangeAspect="1"/>
+          </p:cNvPicPr>
+          <p:nvPr/>
+        </p:nvPicPr>
+        <p:blipFill>
+          <a:blip r:embed="rId6">
+            <a:extLst>
+              <a:ext uri="{28A0092B-C50C-407E-A947-70E740481C1C}">
+                <a14:useLocalDpi xmlns:a14="http://schemas.microsoft.com/office/drawing/2010/main" val="0"/>
+              </a:ext>
+            </a:extLst>
+          </a:blip>
+          <a:stretch>
+            <a:fillRect/>
+          </a:stretch>
+        </p:blipFill>
+        <p:spPr>
+          <a:xfrm>
+            <a:off x="8228499" y="2148753"/>
+            <a:ext cx="604636" cy="604636"/>
+          </a:xfrm>
+          <a:prstGeom prst="rect">
+            <a:avLst/>
+          </a:prstGeom>
+        </p:spPr>
+      </p:pic>
+      <p:pic>
+        <p:nvPicPr>
+          <p:cNvPr id="25" name="Picture 24">
+            <a:extLst>
+              <a:ext uri="{FF2B5EF4-FFF2-40B4-BE49-F238E27FC236}">
+                <a16:creationId xmlns:a16="http://schemas.microsoft.com/office/drawing/2014/main" id="{D2FFBC97-4DB3-4B9B-E374-2550AC671384}"/>
+              </a:ext>
+            </a:extLst>
+          </p:cNvPr>
+          <p:cNvPicPr>
+            <a:picLocks noChangeAspect="1"/>
+          </p:cNvPicPr>
+          <p:nvPr/>
+        </p:nvPicPr>
+        <p:blipFill>
+          <a:blip r:embed="rId7"/>
+          <a:stretch>
+            <a:fillRect/>
+          </a:stretch>
+        </p:blipFill>
+        <p:spPr>
+          <a:xfrm>
+            <a:off x="8312395" y="2272458"/>
+            <a:ext cx="380349" cy="380349"/>
+          </a:xfrm>
+          <a:prstGeom prst="rect">
+            <a:avLst/>
+          </a:prstGeom>
+        </p:spPr>
+      </p:pic>
+      <p:pic>
+        <p:nvPicPr>
+          <p:cNvPr id="27" name="Picture 26">
+            <a:extLst>
+              <a:ext uri="{FF2B5EF4-FFF2-40B4-BE49-F238E27FC236}">
+                <a16:creationId xmlns:a16="http://schemas.microsoft.com/office/drawing/2014/main" id="{5D0B2D4A-48A8-3C36-179D-96F46E63548C}"/>
+              </a:ext>
+            </a:extLst>
+          </p:cNvPr>
+          <p:cNvPicPr>
+            <a:picLocks noChangeAspect="1"/>
+          </p:cNvPicPr>
+          <p:nvPr/>
+        </p:nvPicPr>
+        <p:blipFill>
+          <a:blip r:embed="rId8"/>
+          <a:stretch>
+            <a:fillRect/>
+          </a:stretch>
+        </p:blipFill>
+        <p:spPr>
+          <a:xfrm>
+            <a:off x="9090119" y="2248231"/>
+            <a:ext cx="491717" cy="395634"/>
+          </a:xfrm>
+          <a:prstGeom prst="rect">
+            <a:avLst/>
+          </a:prstGeom>
+        </p:spPr>
+      </p:pic>
+      <p:pic>
+        <p:nvPicPr>
+          <p:cNvPr id="29" name="Picture 28">
+            <a:extLst>
+              <a:ext uri="{FF2B5EF4-FFF2-40B4-BE49-F238E27FC236}">
+                <a16:creationId xmlns:a16="http://schemas.microsoft.com/office/drawing/2014/main" id="{F2A7709F-FCA9-F794-5675-2125861A985D}"/>
+              </a:ext>
+            </a:extLst>
+          </p:cNvPr>
+          <p:cNvPicPr>
+            <a:picLocks noChangeAspect="1"/>
+          </p:cNvPicPr>
+          <p:nvPr/>
+        </p:nvPicPr>
+        <p:blipFill>
+          <a:blip r:embed="rId9"/>
+          <a:stretch>
+            <a:fillRect/>
+          </a:stretch>
+        </p:blipFill>
+        <p:spPr>
+          <a:xfrm>
+            <a:off x="9803337" y="2270643"/>
+            <a:ext cx="548177" cy="340759"/>
+          </a:xfrm>
+          <a:prstGeom prst="rect">
+            <a:avLst/>
+          </a:prstGeom>
+        </p:spPr>
+      </p:pic>
+      <p:pic>
+        <p:nvPicPr>
+          <p:cNvPr id="31" name="Picture 30">
+            <a:extLst>
+              <a:ext uri="{FF2B5EF4-FFF2-40B4-BE49-F238E27FC236}">
+                <a16:creationId xmlns:a16="http://schemas.microsoft.com/office/drawing/2014/main" id="{5219D80F-635C-B4C6-4AD9-9C12C128129E}"/>
+              </a:ext>
+            </a:extLst>
+          </p:cNvPr>
+          <p:cNvPicPr>
+            <a:picLocks noChangeAspect="1"/>
+          </p:cNvPicPr>
+          <p:nvPr/>
+        </p:nvPicPr>
+        <p:blipFill>
+          <a:blip r:embed="rId10"/>
+          <a:stretch>
+            <a:fillRect/>
+          </a:stretch>
+        </p:blipFill>
+        <p:spPr>
+          <a:xfrm>
+            <a:off x="10616353" y="2185623"/>
+            <a:ext cx="376544" cy="486370"/>
           </a:xfrm>
           <a:prstGeom prst="rect">
             <a:avLst/>
@@ -5608,6 +7448,42 @@
           <a:chExt cx="0" cy="0"/>
         </a:xfrm>
       </p:grpSpPr>
+      <p:pic>
+        <p:nvPicPr>
+          <p:cNvPr id="8" name="Picture 7">
+            <a:extLst>
+              <a:ext uri="{FF2B5EF4-FFF2-40B4-BE49-F238E27FC236}">
+                <a16:creationId xmlns:a16="http://schemas.microsoft.com/office/drawing/2014/main" id="{864852A9-7386-0EE3-DDEC-D6487C738089}"/>
+              </a:ext>
+            </a:extLst>
+          </p:cNvPr>
+          <p:cNvPicPr>
+            <a:picLocks noChangeAspect="1"/>
+          </p:cNvPicPr>
+          <p:nvPr/>
+        </p:nvPicPr>
+        <p:blipFill>
+          <a:blip r:embed="rId3">
+            <a:extLst>
+              <a:ext uri="{28A0092B-C50C-407E-A947-70E740481C1C}">
+                <a14:useLocalDpi xmlns:a14="http://schemas.microsoft.com/office/drawing/2010/main" val="0"/>
+              </a:ext>
+            </a:extLst>
+          </a:blip>
+          <a:stretch>
+            <a:fillRect/>
+          </a:stretch>
+        </p:blipFill>
+        <p:spPr>
+          <a:xfrm>
+            <a:off x="177513" y="1371589"/>
+            <a:ext cx="7315215" cy="5486411"/>
+          </a:xfrm>
+          <a:prstGeom prst="rect">
+            <a:avLst/>
+          </a:prstGeom>
+        </p:spPr>
+      </p:pic>
       <p:sp>
         <p:nvSpPr>
           <p:cNvPr id="2" name="Title 1">
@@ -5636,42 +7512,6 @@
           </a:p>
         </p:txBody>
       </p:sp>
-      <p:pic>
-        <p:nvPicPr>
-          <p:cNvPr id="5" name="Picture 4">
-            <a:extLst>
-              <a:ext uri="{FF2B5EF4-FFF2-40B4-BE49-F238E27FC236}">
-                <a16:creationId xmlns:a16="http://schemas.microsoft.com/office/drawing/2014/main" id="{D7F357E7-773D-20F9-3C75-FCD111148DB6}"/>
-              </a:ext>
-            </a:extLst>
-          </p:cNvPr>
-          <p:cNvPicPr>
-            <a:picLocks noChangeAspect="1"/>
-          </p:cNvPicPr>
-          <p:nvPr/>
-        </p:nvPicPr>
-        <p:blipFill>
-          <a:blip r:embed="rId2">
-            <a:extLst>
-              <a:ext uri="{28A0092B-C50C-407E-A947-70E740481C1C}">
-                <a14:useLocalDpi xmlns:a14="http://schemas.microsoft.com/office/drawing/2010/main" val="0"/>
-              </a:ext>
-            </a:extLst>
-          </a:blip>
-          <a:stretch>
-            <a:fillRect/>
-          </a:stretch>
-        </p:blipFill>
-        <p:spPr>
-          <a:xfrm>
-            <a:off x="838200" y="1246232"/>
-            <a:ext cx="7315215" cy="5486411"/>
-          </a:xfrm>
-          <a:prstGeom prst="rect">
-            <a:avLst/>
-          </a:prstGeom>
-        </p:spPr>
-      </p:pic>
       <p:sp>
         <p:nvSpPr>
           <p:cNvPr id="7" name="TextBox 6">
@@ -5686,7 +7526,7 @@
         </p:nvSpPr>
         <p:spPr>
           <a:xfrm>
-            <a:off x="1838632" y="5611768"/>
+            <a:off x="1095054" y="5621816"/>
             <a:ext cx="6096000" cy="461665"/>
           </a:xfrm>
           <a:prstGeom prst="rect">
@@ -5735,7 +7575,7 @@
         </p:nvSpPr>
         <p:spPr>
           <a:xfrm>
-            <a:off x="5732207" y="2110130"/>
+            <a:off x="4978580" y="2120178"/>
             <a:ext cx="6096000" cy="461665"/>
           </a:xfrm>
           <a:prstGeom prst="rect">
@@ -5772,10 +7612,10 @@
       </p:sp>
       <p:sp>
         <p:nvSpPr>
-          <p:cNvPr id="12" name="TextBox 11">
-            <a:extLst>
-              <a:ext uri="{FF2B5EF4-FFF2-40B4-BE49-F238E27FC236}">
-                <a16:creationId xmlns:a16="http://schemas.microsoft.com/office/drawing/2014/main" id="{700A2253-B29E-635B-629A-A974D4C63687}"/>
+          <p:cNvPr id="11" name="TextBox 10">
+            <a:extLst>
+              <a:ext uri="{FF2B5EF4-FFF2-40B4-BE49-F238E27FC236}">
+                <a16:creationId xmlns:a16="http://schemas.microsoft.com/office/drawing/2014/main" id="{7D24B856-64E2-05E1-DBC3-0352CA2A05C4}"/>
               </a:ext>
             </a:extLst>
           </p:cNvPr>
@@ -5784,7 +7624,7 @@
         </p:nvSpPr>
         <p:spPr>
           <a:xfrm>
-            <a:off x="7236541" y="5723434"/>
+            <a:off x="7332459" y="5670442"/>
             <a:ext cx="6096000" cy="769441"/>
           </a:xfrm>
           <a:prstGeom prst="rect">
@@ -5800,12 +7640,276 @@
           <a:p>
             <a:r>
               <a:rPr lang="en-AU" sz="4400" dirty="0"/>
-              <a:t>TM&gt;TMd21&gt;SOL&gt;IC</a:t>
+              <a:t>TM&gt;TMd21=SOL&gt;IC</a:t>
             </a:r>
             <a:endParaRPr lang="en-AU" dirty="0"/>
           </a:p>
         </p:txBody>
       </p:sp>
+      <p:pic>
+        <p:nvPicPr>
+          <p:cNvPr id="14" name="Picture 13">
+            <a:extLst>
+              <a:ext uri="{FF2B5EF4-FFF2-40B4-BE49-F238E27FC236}">
+                <a16:creationId xmlns:a16="http://schemas.microsoft.com/office/drawing/2014/main" id="{0E4CEE14-291D-FA87-4B26-72EB6A13155C}"/>
+              </a:ext>
+            </a:extLst>
+          </p:cNvPr>
+          <p:cNvPicPr>
+            <a:picLocks noChangeAspect="1"/>
+          </p:cNvPicPr>
+          <p:nvPr/>
+        </p:nvPicPr>
+        <p:blipFill>
+          <a:blip r:embed="rId4">
+            <a:extLst>
+              <a:ext uri="{28A0092B-C50C-407E-A947-70E740481C1C}">
+                <a14:useLocalDpi xmlns:a14="http://schemas.microsoft.com/office/drawing/2010/main" val="0"/>
+              </a:ext>
+            </a:extLst>
+          </a:blip>
+          <a:stretch>
+            <a:fillRect/>
+          </a:stretch>
+        </p:blipFill>
+        <p:spPr>
+          <a:xfrm>
+            <a:off x="10893709" y="4699663"/>
+            <a:ext cx="662150" cy="662150"/>
+          </a:xfrm>
+          <a:prstGeom prst="rect">
+            <a:avLst/>
+          </a:prstGeom>
+        </p:spPr>
+      </p:pic>
+      <p:pic>
+        <p:nvPicPr>
+          <p:cNvPr id="16" name="Picture 15">
+            <a:extLst>
+              <a:ext uri="{FF2B5EF4-FFF2-40B4-BE49-F238E27FC236}">
+                <a16:creationId xmlns:a16="http://schemas.microsoft.com/office/drawing/2014/main" id="{74728463-35EA-8DDA-F0BB-B0DC9A217E62}"/>
+              </a:ext>
+            </a:extLst>
+          </p:cNvPr>
+          <p:cNvPicPr>
+            <a:picLocks noChangeAspect="1"/>
+          </p:cNvPicPr>
+          <p:nvPr/>
+        </p:nvPicPr>
+        <p:blipFill>
+          <a:blip r:embed="rId5">
+            <a:extLst>
+              <a:ext uri="{28A0092B-C50C-407E-A947-70E740481C1C}">
+                <a14:useLocalDpi xmlns:a14="http://schemas.microsoft.com/office/drawing/2010/main" val="0"/>
+              </a:ext>
+            </a:extLst>
+          </a:blip>
+          <a:stretch>
+            <a:fillRect/>
+          </a:stretch>
+        </p:blipFill>
+        <p:spPr>
+          <a:xfrm>
+            <a:off x="9285865" y="5066583"/>
+            <a:ext cx="1395640" cy="598983"/>
+          </a:xfrm>
+          <a:prstGeom prst="rect">
+            <a:avLst/>
+          </a:prstGeom>
+        </p:spPr>
+      </p:pic>
+      <p:pic>
+        <p:nvPicPr>
+          <p:cNvPr id="18" name="Picture 17">
+            <a:extLst>
+              <a:ext uri="{FF2B5EF4-FFF2-40B4-BE49-F238E27FC236}">
+                <a16:creationId xmlns:a16="http://schemas.microsoft.com/office/drawing/2014/main" id="{7D70BAA3-763B-6B73-28E0-8BE6E8C31E03}"/>
+              </a:ext>
+            </a:extLst>
+          </p:cNvPr>
+          <p:cNvPicPr>
+            <a:picLocks noChangeAspect="1"/>
+          </p:cNvPicPr>
+          <p:nvPr/>
+        </p:nvPicPr>
+        <p:blipFill>
+          <a:blip r:embed="rId6">
+            <a:extLst>
+              <a:ext uri="{28A0092B-C50C-407E-A947-70E740481C1C}">
+                <a14:useLocalDpi xmlns:a14="http://schemas.microsoft.com/office/drawing/2010/main" val="0"/>
+              </a:ext>
+            </a:extLst>
+          </a:blip>
+          <a:stretch>
+            <a:fillRect/>
+          </a:stretch>
+        </p:blipFill>
+        <p:spPr>
+          <a:xfrm>
+            <a:off x="9273087" y="4299084"/>
+            <a:ext cx="1421196" cy="685063"/>
+          </a:xfrm>
+          <a:prstGeom prst="rect">
+            <a:avLst/>
+          </a:prstGeom>
+        </p:spPr>
+      </p:pic>
+      <p:pic>
+        <p:nvPicPr>
+          <p:cNvPr id="20" name="Picture 19">
+            <a:extLst>
+              <a:ext uri="{FF2B5EF4-FFF2-40B4-BE49-F238E27FC236}">
+                <a16:creationId xmlns:a16="http://schemas.microsoft.com/office/drawing/2014/main" id="{91FBB371-B1DA-844C-15F2-B04B0680D3E4}"/>
+              </a:ext>
+            </a:extLst>
+          </p:cNvPr>
+          <p:cNvPicPr>
+            <a:picLocks noChangeAspect="1"/>
+          </p:cNvPicPr>
+          <p:nvPr/>
+        </p:nvPicPr>
+        <p:blipFill>
+          <a:blip r:embed="rId7">
+            <a:extLst>
+              <a:ext uri="{28A0092B-C50C-407E-A947-70E740481C1C}">
+                <a14:useLocalDpi xmlns:a14="http://schemas.microsoft.com/office/drawing/2010/main" val="0"/>
+              </a:ext>
+            </a:extLst>
+          </a:blip>
+          <a:stretch>
+            <a:fillRect/>
+          </a:stretch>
+        </p:blipFill>
+        <p:spPr>
+          <a:xfrm>
+            <a:off x="7710709" y="4302614"/>
+            <a:ext cx="1362952" cy="1362952"/>
+          </a:xfrm>
+          <a:prstGeom prst="rect">
+            <a:avLst/>
+          </a:prstGeom>
+        </p:spPr>
+      </p:pic>
+      <p:pic>
+        <p:nvPicPr>
+          <p:cNvPr id="22" name="Picture 21">
+            <a:extLst>
+              <a:ext uri="{FF2B5EF4-FFF2-40B4-BE49-F238E27FC236}">
+                <a16:creationId xmlns:a16="http://schemas.microsoft.com/office/drawing/2014/main" id="{39D8A27F-9A2A-6A64-EBAE-E59DB3E5412C}"/>
+              </a:ext>
+            </a:extLst>
+          </p:cNvPr>
+          <p:cNvPicPr>
+            <a:picLocks noChangeAspect="1"/>
+          </p:cNvPicPr>
+          <p:nvPr/>
+        </p:nvPicPr>
+        <p:blipFill>
+          <a:blip r:embed="rId8"/>
+          <a:stretch>
+            <a:fillRect/>
+          </a:stretch>
+        </p:blipFill>
+        <p:spPr>
+          <a:xfrm>
+            <a:off x="7936725" y="4538879"/>
+            <a:ext cx="857370" cy="857370"/>
+          </a:xfrm>
+          <a:prstGeom prst="rect">
+            <a:avLst/>
+          </a:prstGeom>
+        </p:spPr>
+      </p:pic>
+      <p:pic>
+        <p:nvPicPr>
+          <p:cNvPr id="24" name="Picture 23">
+            <a:extLst>
+              <a:ext uri="{FF2B5EF4-FFF2-40B4-BE49-F238E27FC236}">
+                <a16:creationId xmlns:a16="http://schemas.microsoft.com/office/drawing/2014/main" id="{B67430DC-5FED-AA04-C1EA-B0EDA97A23C5}"/>
+              </a:ext>
+            </a:extLst>
+          </p:cNvPr>
+          <p:cNvPicPr>
+            <a:picLocks noChangeAspect="1"/>
+          </p:cNvPicPr>
+          <p:nvPr/>
+        </p:nvPicPr>
+        <p:blipFill>
+          <a:blip r:embed="rId9"/>
+          <a:stretch>
+            <a:fillRect/>
+          </a:stretch>
+        </p:blipFill>
+        <p:spPr>
+          <a:xfrm>
+            <a:off x="9613250" y="4325738"/>
+            <a:ext cx="722737" cy="581512"/>
+          </a:xfrm>
+          <a:prstGeom prst="rect">
+            <a:avLst/>
+          </a:prstGeom>
+        </p:spPr>
+      </p:pic>
+      <p:pic>
+        <p:nvPicPr>
+          <p:cNvPr id="26" name="Picture 25">
+            <a:extLst>
+              <a:ext uri="{FF2B5EF4-FFF2-40B4-BE49-F238E27FC236}">
+                <a16:creationId xmlns:a16="http://schemas.microsoft.com/office/drawing/2014/main" id="{9548281E-178F-81B7-FA6E-EA4191D2E0DE}"/>
+              </a:ext>
+            </a:extLst>
+          </p:cNvPr>
+          <p:cNvPicPr>
+            <a:picLocks noChangeAspect="1"/>
+          </p:cNvPicPr>
+          <p:nvPr/>
+        </p:nvPicPr>
+        <p:blipFill>
+          <a:blip r:embed="rId10"/>
+          <a:stretch>
+            <a:fillRect/>
+          </a:stretch>
+        </p:blipFill>
+        <p:spPr>
+          <a:xfrm>
+            <a:off x="9613250" y="5131543"/>
+            <a:ext cx="740869" cy="460540"/>
+          </a:xfrm>
+          <a:prstGeom prst="rect">
+            <a:avLst/>
+          </a:prstGeom>
+        </p:spPr>
+      </p:pic>
+      <p:pic>
+        <p:nvPicPr>
+          <p:cNvPr id="28" name="Picture 27">
+            <a:extLst>
+              <a:ext uri="{FF2B5EF4-FFF2-40B4-BE49-F238E27FC236}">
+                <a16:creationId xmlns:a16="http://schemas.microsoft.com/office/drawing/2014/main" id="{4D3073D1-037B-FD18-A88F-3AC74C710793}"/>
+              </a:ext>
+            </a:extLst>
+          </p:cNvPr>
+          <p:cNvPicPr>
+            <a:picLocks noChangeAspect="1"/>
+          </p:cNvPicPr>
+          <p:nvPr/>
+        </p:nvPicPr>
+        <p:blipFill>
+          <a:blip r:embed="rId11"/>
+          <a:stretch>
+            <a:fillRect/>
+          </a:stretch>
+        </p:blipFill>
+        <p:spPr>
+          <a:xfrm>
+            <a:off x="11045278" y="4765290"/>
+            <a:ext cx="411015" cy="530895"/>
+          </a:xfrm>
+          <a:prstGeom prst="rect">
+            <a:avLst/>
+          </a:prstGeom>
+        </p:spPr>
+      </p:pic>
     </p:spTree>
     <p:extLst>
       <p:ext uri="{BB962C8B-B14F-4D97-AF65-F5344CB8AC3E}">
@@ -5865,7 +7969,7 @@
           <a:p>
             <a:r>
               <a:rPr lang="en-AU" dirty="0"/>
-              <a:t>Survival of Tetramer+ CD4 T cell (normalised to the starting value)</a:t>
+              <a:t>Survival of Tetramer+ CD4 T cell</a:t>
             </a:r>
           </a:p>
         </p:txBody>
@@ -5884,7 +7988,7 @@
         </p:nvSpPr>
         <p:spPr>
           <a:xfrm>
-            <a:off x="6951407" y="5723434"/>
+            <a:off x="7287987" y="5983556"/>
             <a:ext cx="6096000" cy="769441"/>
           </a:xfrm>
           <a:prstGeom prst="rect">
@@ -5908,10 +8012,10 @@
       </p:sp>
       <p:pic>
         <p:nvPicPr>
-          <p:cNvPr id="8" name="Picture 7">
-            <a:extLst>
-              <a:ext uri="{FF2B5EF4-FFF2-40B4-BE49-F238E27FC236}">
-                <a16:creationId xmlns:a16="http://schemas.microsoft.com/office/drawing/2014/main" id="{403CF748-875A-10CC-BCCD-25A30A88D180}"/>
+          <p:cNvPr id="4" name="Picture 3">
+            <a:extLst>
+              <a:ext uri="{FF2B5EF4-FFF2-40B4-BE49-F238E27FC236}">
+                <a16:creationId xmlns:a16="http://schemas.microsoft.com/office/drawing/2014/main" id="{91C61DDA-965B-CCBD-5AC8-C49D2F77CC87}"/>
               </a:ext>
             </a:extLst>
           </p:cNvPr>
@@ -5934,122 +8038,278 @@
         </p:blipFill>
         <p:spPr>
           <a:xfrm>
-            <a:off x="275304" y="1850923"/>
-            <a:ext cx="6676103" cy="5007077"/>
-          </a:xfrm>
-          <a:prstGeom prst="rect">
-            <a:avLst/>
-          </a:prstGeom>
-        </p:spPr>
-      </p:pic>
-      <p:sp>
-        <p:nvSpPr>
-          <p:cNvPr id="11" name="TextBox 10">
-            <a:extLst>
-              <a:ext uri="{FF2B5EF4-FFF2-40B4-BE49-F238E27FC236}">
-                <a16:creationId xmlns:a16="http://schemas.microsoft.com/office/drawing/2014/main" id="{083B0FBB-5E0B-1FF9-8804-64F7F25304F6}"/>
-              </a:ext>
-            </a:extLst>
-          </p:cNvPr>
-          <p:cNvSpPr txBox="1"/>
-          <p:nvPr/>
-        </p:nvSpPr>
-        <p:spPr>
-          <a:xfrm>
-            <a:off x="7143136" y="2970916"/>
-            <a:ext cx="6096000" cy="1446550"/>
-          </a:xfrm>
-          <a:prstGeom prst="rect">
-            <a:avLst/>
-          </a:prstGeom>
-          <a:noFill/>
-        </p:spPr>
-        <p:txBody>
-          <a:bodyPr wrap="square">
-            <a:spAutoFit/>
-          </a:bodyPr>
-          <a:lstStyle/>
-          <a:p>
-            <a:r>
-              <a:rPr lang="en-AU" sz="4400" dirty="0"/>
-              <a:t>TM seems to decay faster</a:t>
-            </a:r>
-            <a:endParaRPr lang="en-AU" dirty="0"/>
-          </a:p>
-        </p:txBody>
-      </p:sp>
-      <p:sp>
-        <p:nvSpPr>
-          <p:cNvPr id="14" name="TextBox 13">
-            <a:extLst>
-              <a:ext uri="{FF2B5EF4-FFF2-40B4-BE49-F238E27FC236}">
-                <a16:creationId xmlns:a16="http://schemas.microsoft.com/office/drawing/2014/main" id="{B832A057-834E-F3AC-8300-805738C4C672}"/>
-              </a:ext>
-            </a:extLst>
-          </p:cNvPr>
-          <p:cNvSpPr txBox="1"/>
-          <p:nvPr/>
-        </p:nvSpPr>
-        <p:spPr>
-          <a:xfrm>
-            <a:off x="6867832" y="4793758"/>
-            <a:ext cx="6096000" cy="769441"/>
-          </a:xfrm>
-          <a:prstGeom prst="rect">
-            <a:avLst/>
-          </a:prstGeom>
-          <a:noFill/>
-        </p:spPr>
-        <p:txBody>
-          <a:bodyPr wrap="square">
-            <a:spAutoFit/>
-          </a:bodyPr>
-          <a:lstStyle/>
-          <a:p>
-            <a:r>
-              <a:rPr lang="en-AU" sz="4400" dirty="0"/>
-              <a:t>IC seems to be stable</a:t>
-            </a:r>
-            <a:endParaRPr lang="en-AU" dirty="0"/>
-          </a:p>
-        </p:txBody>
-      </p:sp>
-      <p:sp>
-        <p:nvSpPr>
-          <p:cNvPr id="16" name="TextBox 15">
-            <a:extLst>
-              <a:ext uri="{FF2B5EF4-FFF2-40B4-BE49-F238E27FC236}">
-                <a16:creationId xmlns:a16="http://schemas.microsoft.com/office/drawing/2014/main" id="{447DA747-B557-CD3A-F5C9-EB4FCCBDEDA7}"/>
-              </a:ext>
-            </a:extLst>
-          </p:cNvPr>
-          <p:cNvSpPr txBox="1"/>
-          <p:nvPr/>
-        </p:nvSpPr>
-        <p:spPr>
-          <a:xfrm>
-            <a:off x="7143136" y="1850923"/>
-            <a:ext cx="6096000" cy="769441"/>
-          </a:xfrm>
-          <a:prstGeom prst="rect">
-            <a:avLst/>
-          </a:prstGeom>
-          <a:noFill/>
-        </p:spPr>
-        <p:txBody>
-          <a:bodyPr wrap="square">
-            <a:spAutoFit/>
-          </a:bodyPr>
-          <a:lstStyle/>
-          <a:p>
-            <a:r>
-              <a:rPr lang="en-AU" sz="4400" dirty="0"/>
-              <a:t>Biphasic decay</a:t>
-            </a:r>
-            <a:endParaRPr lang="en-AU" dirty="0"/>
-          </a:p>
-        </p:txBody>
-      </p:sp>
+            <a:off x="0" y="1371589"/>
+            <a:ext cx="7315215" cy="5486411"/>
+          </a:xfrm>
+          <a:prstGeom prst="rect">
+            <a:avLst/>
+          </a:prstGeom>
+        </p:spPr>
+      </p:pic>
+      <p:pic>
+        <p:nvPicPr>
+          <p:cNvPr id="9" name="Picture 8">
+            <a:extLst>
+              <a:ext uri="{FF2B5EF4-FFF2-40B4-BE49-F238E27FC236}">
+                <a16:creationId xmlns:a16="http://schemas.microsoft.com/office/drawing/2014/main" id="{58FF1ABD-7AC1-7F9E-5F20-E69681C25E91}"/>
+              </a:ext>
+            </a:extLst>
+          </p:cNvPr>
+          <p:cNvPicPr>
+            <a:picLocks noChangeAspect="1"/>
+          </p:cNvPicPr>
+          <p:nvPr/>
+        </p:nvPicPr>
+        <p:blipFill>
+          <a:blip r:embed="rId3">
+            <a:extLst>
+              <a:ext uri="{28A0092B-C50C-407E-A947-70E740481C1C}">
+                <a14:useLocalDpi xmlns:a14="http://schemas.microsoft.com/office/drawing/2010/main" val="0"/>
+              </a:ext>
+            </a:extLst>
+          </a:blip>
+          <a:stretch>
+            <a:fillRect/>
+          </a:stretch>
+        </p:blipFill>
+        <p:spPr>
+          <a:xfrm>
+            <a:off x="10893709" y="4699663"/>
+            <a:ext cx="662150" cy="662150"/>
+          </a:xfrm>
+          <a:prstGeom prst="rect">
+            <a:avLst/>
+          </a:prstGeom>
+        </p:spPr>
+      </p:pic>
+      <p:pic>
+        <p:nvPicPr>
+          <p:cNvPr id="13" name="Picture 12">
+            <a:extLst>
+              <a:ext uri="{FF2B5EF4-FFF2-40B4-BE49-F238E27FC236}">
+                <a16:creationId xmlns:a16="http://schemas.microsoft.com/office/drawing/2014/main" id="{D2BFEB10-79F4-1AC3-19B9-6BA11AE3B621}"/>
+              </a:ext>
+            </a:extLst>
+          </p:cNvPr>
+          <p:cNvPicPr>
+            <a:picLocks noChangeAspect="1"/>
+          </p:cNvPicPr>
+          <p:nvPr/>
+        </p:nvPicPr>
+        <p:blipFill>
+          <a:blip r:embed="rId4">
+            <a:extLst>
+              <a:ext uri="{28A0092B-C50C-407E-A947-70E740481C1C}">
+                <a14:useLocalDpi xmlns:a14="http://schemas.microsoft.com/office/drawing/2010/main" val="0"/>
+              </a:ext>
+            </a:extLst>
+          </a:blip>
+          <a:stretch>
+            <a:fillRect/>
+          </a:stretch>
+        </p:blipFill>
+        <p:spPr>
+          <a:xfrm>
+            <a:off x="9285865" y="5066583"/>
+            <a:ext cx="1395640" cy="598983"/>
+          </a:xfrm>
+          <a:prstGeom prst="rect">
+            <a:avLst/>
+          </a:prstGeom>
+        </p:spPr>
+      </p:pic>
+      <p:pic>
+        <p:nvPicPr>
+          <p:cNvPr id="17" name="Picture 16">
+            <a:extLst>
+              <a:ext uri="{FF2B5EF4-FFF2-40B4-BE49-F238E27FC236}">
+                <a16:creationId xmlns:a16="http://schemas.microsoft.com/office/drawing/2014/main" id="{4BC3D72C-B3B9-3218-912A-E4D921A00B8B}"/>
+              </a:ext>
+            </a:extLst>
+          </p:cNvPr>
+          <p:cNvPicPr>
+            <a:picLocks noChangeAspect="1"/>
+          </p:cNvPicPr>
+          <p:nvPr/>
+        </p:nvPicPr>
+        <p:blipFill>
+          <a:blip r:embed="rId5">
+            <a:extLst>
+              <a:ext uri="{28A0092B-C50C-407E-A947-70E740481C1C}">
+                <a14:useLocalDpi xmlns:a14="http://schemas.microsoft.com/office/drawing/2010/main" val="0"/>
+              </a:ext>
+            </a:extLst>
+          </a:blip>
+          <a:stretch>
+            <a:fillRect/>
+          </a:stretch>
+        </p:blipFill>
+        <p:spPr>
+          <a:xfrm>
+            <a:off x="9273087" y="4299084"/>
+            <a:ext cx="1421196" cy="685063"/>
+          </a:xfrm>
+          <a:prstGeom prst="rect">
+            <a:avLst/>
+          </a:prstGeom>
+        </p:spPr>
+      </p:pic>
+      <p:pic>
+        <p:nvPicPr>
+          <p:cNvPr id="19" name="Picture 18">
+            <a:extLst>
+              <a:ext uri="{FF2B5EF4-FFF2-40B4-BE49-F238E27FC236}">
+                <a16:creationId xmlns:a16="http://schemas.microsoft.com/office/drawing/2014/main" id="{C8BFB5C2-666C-E841-8456-87D13FEFF266}"/>
+              </a:ext>
+            </a:extLst>
+          </p:cNvPr>
+          <p:cNvPicPr>
+            <a:picLocks noChangeAspect="1"/>
+          </p:cNvPicPr>
+          <p:nvPr/>
+        </p:nvPicPr>
+        <p:blipFill>
+          <a:blip r:embed="rId6">
+            <a:extLst>
+              <a:ext uri="{28A0092B-C50C-407E-A947-70E740481C1C}">
+                <a14:useLocalDpi xmlns:a14="http://schemas.microsoft.com/office/drawing/2010/main" val="0"/>
+              </a:ext>
+            </a:extLst>
+          </a:blip>
+          <a:stretch>
+            <a:fillRect/>
+          </a:stretch>
+        </p:blipFill>
+        <p:spPr>
+          <a:xfrm>
+            <a:off x="7710709" y="4302614"/>
+            <a:ext cx="1362952" cy="1362952"/>
+          </a:xfrm>
+          <a:prstGeom prst="rect">
+            <a:avLst/>
+          </a:prstGeom>
+        </p:spPr>
+      </p:pic>
+      <p:pic>
+        <p:nvPicPr>
+          <p:cNvPr id="21" name="Picture 20">
+            <a:extLst>
+              <a:ext uri="{FF2B5EF4-FFF2-40B4-BE49-F238E27FC236}">
+                <a16:creationId xmlns:a16="http://schemas.microsoft.com/office/drawing/2014/main" id="{3AC250E2-6BF2-9E04-42FD-A919A2E5EB3B}"/>
+              </a:ext>
+            </a:extLst>
+          </p:cNvPr>
+          <p:cNvPicPr>
+            <a:picLocks noChangeAspect="1"/>
+          </p:cNvPicPr>
+          <p:nvPr/>
+        </p:nvPicPr>
+        <p:blipFill>
+          <a:blip r:embed="rId7"/>
+          <a:stretch>
+            <a:fillRect/>
+          </a:stretch>
+        </p:blipFill>
+        <p:spPr>
+          <a:xfrm>
+            <a:off x="7936725" y="4538879"/>
+            <a:ext cx="857370" cy="857370"/>
+          </a:xfrm>
+          <a:prstGeom prst="rect">
+            <a:avLst/>
+          </a:prstGeom>
+        </p:spPr>
+      </p:pic>
+      <p:pic>
+        <p:nvPicPr>
+          <p:cNvPr id="23" name="Picture 22">
+            <a:extLst>
+              <a:ext uri="{FF2B5EF4-FFF2-40B4-BE49-F238E27FC236}">
+                <a16:creationId xmlns:a16="http://schemas.microsoft.com/office/drawing/2014/main" id="{83FC1B31-D86D-638F-225B-58D3D47E855B}"/>
+              </a:ext>
+            </a:extLst>
+          </p:cNvPr>
+          <p:cNvPicPr>
+            <a:picLocks noChangeAspect="1"/>
+          </p:cNvPicPr>
+          <p:nvPr/>
+        </p:nvPicPr>
+        <p:blipFill>
+          <a:blip r:embed="rId8"/>
+          <a:stretch>
+            <a:fillRect/>
+          </a:stretch>
+        </p:blipFill>
+        <p:spPr>
+          <a:xfrm>
+            <a:off x="9613250" y="4325738"/>
+            <a:ext cx="722737" cy="581512"/>
+          </a:xfrm>
+          <a:prstGeom prst="rect">
+            <a:avLst/>
+          </a:prstGeom>
+        </p:spPr>
+      </p:pic>
+      <p:pic>
+        <p:nvPicPr>
+          <p:cNvPr id="25" name="Picture 24">
+            <a:extLst>
+              <a:ext uri="{FF2B5EF4-FFF2-40B4-BE49-F238E27FC236}">
+                <a16:creationId xmlns:a16="http://schemas.microsoft.com/office/drawing/2014/main" id="{31BF8CC8-219B-8B37-B7AC-EB091FE069FF}"/>
+              </a:ext>
+            </a:extLst>
+          </p:cNvPr>
+          <p:cNvPicPr>
+            <a:picLocks noChangeAspect="1"/>
+          </p:cNvPicPr>
+          <p:nvPr/>
+        </p:nvPicPr>
+        <p:blipFill>
+          <a:blip r:embed="rId9"/>
+          <a:stretch>
+            <a:fillRect/>
+          </a:stretch>
+        </p:blipFill>
+        <p:spPr>
+          <a:xfrm>
+            <a:off x="9613250" y="5131543"/>
+            <a:ext cx="740869" cy="460540"/>
+          </a:xfrm>
+          <a:prstGeom prst="rect">
+            <a:avLst/>
+          </a:prstGeom>
+        </p:spPr>
+      </p:pic>
+      <p:pic>
+        <p:nvPicPr>
+          <p:cNvPr id="27" name="Picture 26">
+            <a:extLst>
+              <a:ext uri="{FF2B5EF4-FFF2-40B4-BE49-F238E27FC236}">
+                <a16:creationId xmlns:a16="http://schemas.microsoft.com/office/drawing/2014/main" id="{E6C7A0B2-62A2-5AD4-2884-F6C44B9C3B66}"/>
+              </a:ext>
+            </a:extLst>
+          </p:cNvPr>
+          <p:cNvPicPr>
+            <a:picLocks noChangeAspect="1"/>
+          </p:cNvPicPr>
+          <p:nvPr/>
+        </p:nvPicPr>
+        <p:blipFill>
+          <a:blip r:embed="rId10"/>
+          <a:stretch>
+            <a:fillRect/>
+          </a:stretch>
+        </p:blipFill>
+        <p:spPr>
+          <a:xfrm>
+            <a:off x="11045278" y="4765290"/>
+            <a:ext cx="411015" cy="530895"/>
+          </a:xfrm>
+          <a:prstGeom prst="rect">
+            <a:avLst/>
+          </a:prstGeom>
+        </p:spPr>
+      </p:pic>
     </p:spTree>
     <p:extLst>
       <p:ext uri="{BB962C8B-B14F-4D97-AF65-F5344CB8AC3E}">
@@ -6088,10 +8348,10 @@
       </p:grpSpPr>
       <p:pic>
         <p:nvPicPr>
-          <p:cNvPr id="8" name="Picture 7">
-            <a:extLst>
-              <a:ext uri="{FF2B5EF4-FFF2-40B4-BE49-F238E27FC236}">
-                <a16:creationId xmlns:a16="http://schemas.microsoft.com/office/drawing/2014/main" id="{29C224CC-E1CD-6DD4-96BC-50A7FCB80D40}"/>
+          <p:cNvPr id="4" name="Picture 3">
+            <a:extLst>
+              <a:ext uri="{FF2B5EF4-FFF2-40B4-BE49-F238E27FC236}">
+                <a16:creationId xmlns:a16="http://schemas.microsoft.com/office/drawing/2014/main" id="{3401BE1E-BA96-373B-41D2-8099444C3985}"/>
               </a:ext>
             </a:extLst>
           </p:cNvPr>
@@ -6114,7 +8374,7 @@
         </p:blipFill>
         <p:spPr>
           <a:xfrm>
-            <a:off x="0" y="1371589"/>
+            <a:off x="0" y="1372185"/>
             <a:ext cx="7315215" cy="5486411"/>
           </a:xfrm>
           <a:prstGeom prst="rect">
@@ -6144,9 +8404,10 @@
           <a:lstStyle/>
           <a:p>
             <a:r>
-              <a:rPr lang="en-AU" dirty="0"/>
+              <a:rPr lang="en-AU"/>
               <a:t>Tetramer+ CD8 T cell</a:t>
             </a:r>
+            <a:endParaRPr lang="en-AU" dirty="0"/>
           </a:p>
         </p:txBody>
       </p:sp>
@@ -6164,7 +8425,7 @@
         </p:nvSpPr>
         <p:spPr>
           <a:xfrm>
-            <a:off x="6931741" y="5723434"/>
+            <a:off x="7145161" y="5196230"/>
             <a:ext cx="6096000" cy="769441"/>
           </a:xfrm>
           <a:prstGeom prst="rect">
@@ -6186,6 +8447,270 @@
           </a:p>
         </p:txBody>
       </p:sp>
+      <p:pic>
+        <p:nvPicPr>
+          <p:cNvPr id="9" name="Picture 8">
+            <a:extLst>
+              <a:ext uri="{FF2B5EF4-FFF2-40B4-BE49-F238E27FC236}">
+                <a16:creationId xmlns:a16="http://schemas.microsoft.com/office/drawing/2014/main" id="{21F640C9-5809-D334-B5E6-F84D86BC52A7}"/>
+              </a:ext>
+            </a:extLst>
+          </p:cNvPr>
+          <p:cNvPicPr>
+            <a:picLocks noChangeAspect="1"/>
+          </p:cNvPicPr>
+          <p:nvPr/>
+        </p:nvPicPr>
+        <p:blipFill>
+          <a:blip r:embed="rId3">
+            <a:extLst>
+              <a:ext uri="{28A0092B-C50C-407E-A947-70E740481C1C}">
+                <a14:useLocalDpi xmlns:a14="http://schemas.microsoft.com/office/drawing/2010/main" val="0"/>
+              </a:ext>
+            </a:extLst>
+          </a:blip>
+          <a:stretch>
+            <a:fillRect/>
+          </a:stretch>
+        </p:blipFill>
+        <p:spPr>
+          <a:xfrm>
+            <a:off x="9124907" y="3919731"/>
+            <a:ext cx="1068254" cy="1040234"/>
+          </a:xfrm>
+          <a:prstGeom prst="rect">
+            <a:avLst/>
+          </a:prstGeom>
+        </p:spPr>
+      </p:pic>
+      <p:pic>
+        <p:nvPicPr>
+          <p:cNvPr id="11" name="Picture 10">
+            <a:extLst>
+              <a:ext uri="{FF2B5EF4-FFF2-40B4-BE49-F238E27FC236}">
+                <a16:creationId xmlns:a16="http://schemas.microsoft.com/office/drawing/2014/main" id="{C3E39572-5796-69E1-EEB8-4BD0684F17FC}"/>
+              </a:ext>
+            </a:extLst>
+          </p:cNvPr>
+          <p:cNvPicPr>
+            <a:picLocks noChangeAspect="1"/>
+          </p:cNvPicPr>
+          <p:nvPr/>
+        </p:nvPicPr>
+        <p:blipFill>
+          <a:blip r:embed="rId4">
+            <a:extLst>
+              <a:ext uri="{28A0092B-C50C-407E-A947-70E740481C1C}">
+                <a14:useLocalDpi xmlns:a14="http://schemas.microsoft.com/office/drawing/2010/main" val="0"/>
+              </a:ext>
+            </a:extLst>
+          </a:blip>
+          <a:stretch>
+            <a:fillRect/>
+          </a:stretch>
+        </p:blipFill>
+        <p:spPr>
+          <a:xfrm>
+            <a:off x="11364399" y="3917786"/>
+            <a:ext cx="648826" cy="592339"/>
+          </a:xfrm>
+          <a:prstGeom prst="rect">
+            <a:avLst/>
+          </a:prstGeom>
+        </p:spPr>
+      </p:pic>
+      <p:pic>
+        <p:nvPicPr>
+          <p:cNvPr id="14" name="Picture 13">
+            <a:extLst>
+              <a:ext uri="{FF2B5EF4-FFF2-40B4-BE49-F238E27FC236}">
+                <a16:creationId xmlns:a16="http://schemas.microsoft.com/office/drawing/2014/main" id="{09BC0133-951F-FE41-0C77-EDF43CE4A44A}"/>
+              </a:ext>
+            </a:extLst>
+          </p:cNvPr>
+          <p:cNvPicPr>
+            <a:picLocks noChangeAspect="1"/>
+          </p:cNvPicPr>
+          <p:nvPr/>
+        </p:nvPicPr>
+        <p:blipFill>
+          <a:blip r:embed="rId5">
+            <a:extLst>
+              <a:ext uri="{28A0092B-C50C-407E-A947-70E740481C1C}">
+                <a14:useLocalDpi xmlns:a14="http://schemas.microsoft.com/office/drawing/2010/main" val="0"/>
+              </a:ext>
+            </a:extLst>
+          </a:blip>
+          <a:stretch>
+            <a:fillRect/>
+          </a:stretch>
+        </p:blipFill>
+        <p:spPr>
+          <a:xfrm>
+            <a:off x="10397436" y="3917786"/>
+            <a:ext cx="841229" cy="834098"/>
+          </a:xfrm>
+          <a:prstGeom prst="rect">
+            <a:avLst/>
+          </a:prstGeom>
+        </p:spPr>
+      </p:pic>
+      <p:pic>
+        <p:nvPicPr>
+          <p:cNvPr id="16" name="Picture 15">
+            <a:extLst>
+              <a:ext uri="{FF2B5EF4-FFF2-40B4-BE49-F238E27FC236}">
+                <a16:creationId xmlns:a16="http://schemas.microsoft.com/office/drawing/2014/main" id="{1E76D05F-3641-3E68-8A85-161E3C0F51AB}"/>
+              </a:ext>
+            </a:extLst>
+          </p:cNvPr>
+          <p:cNvPicPr>
+            <a:picLocks noChangeAspect="1"/>
+          </p:cNvPicPr>
+          <p:nvPr/>
+        </p:nvPicPr>
+        <p:blipFill>
+          <a:blip r:embed="rId6">
+            <a:extLst>
+              <a:ext uri="{28A0092B-C50C-407E-A947-70E740481C1C}">
+                <a14:useLocalDpi xmlns:a14="http://schemas.microsoft.com/office/drawing/2010/main" val="0"/>
+              </a:ext>
+            </a:extLst>
+          </a:blip>
+          <a:stretch>
+            <a:fillRect/>
+          </a:stretch>
+        </p:blipFill>
+        <p:spPr>
+          <a:xfrm>
+            <a:off x="7595574" y="3917785"/>
+            <a:ext cx="1362952" cy="1362952"/>
+          </a:xfrm>
+          <a:prstGeom prst="rect">
+            <a:avLst/>
+          </a:prstGeom>
+        </p:spPr>
+      </p:pic>
+      <p:pic>
+        <p:nvPicPr>
+          <p:cNvPr id="20" name="Picture 19">
+            <a:extLst>
+              <a:ext uri="{FF2B5EF4-FFF2-40B4-BE49-F238E27FC236}">
+                <a16:creationId xmlns:a16="http://schemas.microsoft.com/office/drawing/2014/main" id="{14239CFA-6769-A63E-7EBD-904C1D916252}"/>
+              </a:ext>
+            </a:extLst>
+          </p:cNvPr>
+          <p:cNvPicPr>
+            <a:picLocks noChangeAspect="1"/>
+          </p:cNvPicPr>
+          <p:nvPr/>
+        </p:nvPicPr>
+        <p:blipFill>
+          <a:blip r:embed="rId7"/>
+          <a:stretch>
+            <a:fillRect/>
+          </a:stretch>
+        </p:blipFill>
+        <p:spPr>
+          <a:xfrm>
+            <a:off x="7821590" y="4154050"/>
+            <a:ext cx="857370" cy="857370"/>
+          </a:xfrm>
+          <a:prstGeom prst="rect">
+            <a:avLst/>
+          </a:prstGeom>
+        </p:spPr>
+      </p:pic>
+      <p:pic>
+        <p:nvPicPr>
+          <p:cNvPr id="23" name="Picture 22">
+            <a:extLst>
+              <a:ext uri="{FF2B5EF4-FFF2-40B4-BE49-F238E27FC236}">
+                <a16:creationId xmlns:a16="http://schemas.microsoft.com/office/drawing/2014/main" id="{4EA6E91A-DEE5-DBDC-7514-44D43B5DF3B9}"/>
+              </a:ext>
+            </a:extLst>
+          </p:cNvPr>
+          <p:cNvPicPr>
+            <a:picLocks noChangeAspect="1"/>
+          </p:cNvPicPr>
+          <p:nvPr/>
+        </p:nvPicPr>
+        <p:blipFill>
+          <a:blip r:embed="rId8"/>
+          <a:stretch>
+            <a:fillRect/>
+          </a:stretch>
+        </p:blipFill>
+        <p:spPr>
+          <a:xfrm>
+            <a:off x="10501740" y="4106247"/>
+            <a:ext cx="627436" cy="504833"/>
+          </a:xfrm>
+          <a:prstGeom prst="rect">
+            <a:avLst/>
+          </a:prstGeom>
+        </p:spPr>
+      </p:pic>
+      <p:pic>
+        <p:nvPicPr>
+          <p:cNvPr id="25" name="Picture 24">
+            <a:extLst>
+              <a:ext uri="{FF2B5EF4-FFF2-40B4-BE49-F238E27FC236}">
+                <a16:creationId xmlns:a16="http://schemas.microsoft.com/office/drawing/2014/main" id="{81C74072-C112-4CAD-12ED-7BC0DBC02B4B}"/>
+              </a:ext>
+            </a:extLst>
+          </p:cNvPr>
+          <p:cNvPicPr>
+            <a:picLocks noChangeAspect="1"/>
+          </p:cNvPicPr>
+          <p:nvPr/>
+        </p:nvPicPr>
+        <p:blipFill>
+          <a:blip r:embed="rId9"/>
+          <a:stretch>
+            <a:fillRect/>
+          </a:stretch>
+        </p:blipFill>
+        <p:spPr>
+          <a:xfrm>
+            <a:off x="11377556" y="4003781"/>
+            <a:ext cx="620576" cy="385763"/>
+          </a:xfrm>
+          <a:prstGeom prst="rect">
+            <a:avLst/>
+          </a:prstGeom>
+        </p:spPr>
+      </p:pic>
+      <p:pic>
+        <p:nvPicPr>
+          <p:cNvPr id="27" name="Picture 26">
+            <a:extLst>
+              <a:ext uri="{FF2B5EF4-FFF2-40B4-BE49-F238E27FC236}">
+                <a16:creationId xmlns:a16="http://schemas.microsoft.com/office/drawing/2014/main" id="{4F12748B-6417-61A1-7259-DE257A82085A}"/>
+              </a:ext>
+            </a:extLst>
+          </p:cNvPr>
+          <p:cNvPicPr>
+            <a:picLocks noChangeAspect="1"/>
+          </p:cNvPicPr>
+          <p:nvPr/>
+        </p:nvPicPr>
+        <p:blipFill>
+          <a:blip r:embed="rId10"/>
+          <a:stretch>
+            <a:fillRect/>
+          </a:stretch>
+        </p:blipFill>
+        <p:spPr>
+          <a:xfrm>
+            <a:off x="9329182" y="4106247"/>
+            <a:ext cx="659703" cy="667202"/>
+          </a:xfrm>
+          <a:prstGeom prst="rect">
+            <a:avLst/>
+          </a:prstGeom>
+        </p:spPr>
+      </p:pic>
     </p:spTree>
     <p:extLst>
       <p:ext uri="{BB962C8B-B14F-4D97-AF65-F5344CB8AC3E}">
@@ -6222,42 +8747,6 @@
           <a:chExt cx="0" cy="0"/>
         </a:xfrm>
       </p:grpSpPr>
-      <p:pic>
-        <p:nvPicPr>
-          <p:cNvPr id="4" name="Picture 3">
-            <a:extLst>
-              <a:ext uri="{FF2B5EF4-FFF2-40B4-BE49-F238E27FC236}">
-                <a16:creationId xmlns:a16="http://schemas.microsoft.com/office/drawing/2014/main" id="{65551F23-4FDB-552B-3469-49C9FDE4B049}"/>
-              </a:ext>
-            </a:extLst>
-          </p:cNvPr>
-          <p:cNvPicPr>
-            <a:picLocks noChangeAspect="1"/>
-          </p:cNvPicPr>
-          <p:nvPr/>
-        </p:nvPicPr>
-        <p:blipFill>
-          <a:blip r:embed="rId2">
-            <a:extLst>
-              <a:ext uri="{28A0092B-C50C-407E-A947-70E740481C1C}">
-                <a14:useLocalDpi xmlns:a14="http://schemas.microsoft.com/office/drawing/2010/main" val="0"/>
-              </a:ext>
-            </a:extLst>
-          </a:blip>
-          <a:stretch>
-            <a:fillRect/>
-          </a:stretch>
-        </p:blipFill>
-        <p:spPr>
-          <a:xfrm>
-            <a:off x="4902" y="1504325"/>
-            <a:ext cx="7138234" cy="5353675"/>
-          </a:xfrm>
-          <a:prstGeom prst="rect">
-            <a:avLst/>
-          </a:prstGeom>
-        </p:spPr>
-      </p:pic>
       <p:sp>
         <p:nvSpPr>
           <p:cNvPr id="2" name="Title 1">
@@ -6281,7 +8770,7 @@
           <a:p>
             <a:r>
               <a:rPr lang="en-AU" dirty="0"/>
-              <a:t>Survival of Tetramer+ CD8 T cell (normalised to the starting value)</a:t>
+              <a:t>Survival of Tetramer+ CD8 T cell</a:t>
             </a:r>
           </a:p>
         </p:txBody>
@@ -6300,7 +8789,7 @@
         </p:nvSpPr>
         <p:spPr>
           <a:xfrm>
-            <a:off x="6951407" y="5723434"/>
+            <a:off x="8106324" y="5519811"/>
             <a:ext cx="6096000" cy="769441"/>
           </a:xfrm>
           <a:prstGeom prst="rect">
@@ -6316,48 +8805,312 @@
           <a:p>
             <a:r>
               <a:rPr lang="en-AU" sz="4400" dirty="0"/>
-              <a:t>Decay seems similar</a:t>
+              <a:t>Similar decay</a:t>
             </a:r>
             <a:endParaRPr lang="en-AU" dirty="0"/>
           </a:p>
         </p:txBody>
       </p:sp>
-      <p:sp>
-        <p:nvSpPr>
-          <p:cNvPr id="16" name="TextBox 15">
-            <a:extLst>
-              <a:ext uri="{FF2B5EF4-FFF2-40B4-BE49-F238E27FC236}">
-                <a16:creationId xmlns:a16="http://schemas.microsoft.com/office/drawing/2014/main" id="{90038D15-1400-4574-9ED5-DFF171C9A11A}"/>
-              </a:ext>
-            </a:extLst>
-          </p:cNvPr>
-          <p:cNvSpPr txBox="1"/>
-          <p:nvPr/>
-        </p:nvSpPr>
-        <p:spPr>
-          <a:xfrm>
-            <a:off x="7143136" y="1850923"/>
-            <a:ext cx="6096000" cy="769441"/>
-          </a:xfrm>
-          <a:prstGeom prst="rect">
-            <a:avLst/>
-          </a:prstGeom>
-          <a:noFill/>
-        </p:spPr>
-        <p:txBody>
-          <a:bodyPr wrap="square">
-            <a:spAutoFit/>
-          </a:bodyPr>
-          <a:lstStyle/>
-          <a:p>
-            <a:r>
-              <a:rPr lang="en-AU" sz="4400" dirty="0"/>
-              <a:t>Biphasic decay</a:t>
-            </a:r>
-            <a:endParaRPr lang="en-AU" dirty="0"/>
-          </a:p>
-        </p:txBody>
-      </p:sp>
+      <p:pic>
+        <p:nvPicPr>
+          <p:cNvPr id="5" name="Picture 4">
+            <a:extLst>
+              <a:ext uri="{FF2B5EF4-FFF2-40B4-BE49-F238E27FC236}">
+                <a16:creationId xmlns:a16="http://schemas.microsoft.com/office/drawing/2014/main" id="{BB00C168-A5CE-6B1A-9297-8400DECC95F2}"/>
+              </a:ext>
+            </a:extLst>
+          </p:cNvPr>
+          <p:cNvPicPr>
+            <a:picLocks noChangeAspect="1"/>
+          </p:cNvPicPr>
+          <p:nvPr/>
+        </p:nvPicPr>
+        <p:blipFill>
+          <a:blip r:embed="rId2">
+            <a:extLst>
+              <a:ext uri="{28A0092B-C50C-407E-A947-70E740481C1C}">
+                <a14:useLocalDpi xmlns:a14="http://schemas.microsoft.com/office/drawing/2010/main" val="0"/>
+              </a:ext>
+            </a:extLst>
+          </a:blip>
+          <a:stretch>
+            <a:fillRect/>
+          </a:stretch>
+        </p:blipFill>
+        <p:spPr>
+          <a:xfrm>
+            <a:off x="0" y="1371589"/>
+            <a:ext cx="7315215" cy="5486411"/>
+          </a:xfrm>
+          <a:prstGeom prst="rect">
+            <a:avLst/>
+          </a:prstGeom>
+        </p:spPr>
+      </p:pic>
+      <p:pic>
+        <p:nvPicPr>
+          <p:cNvPr id="9" name="Picture 8">
+            <a:extLst>
+              <a:ext uri="{FF2B5EF4-FFF2-40B4-BE49-F238E27FC236}">
+                <a16:creationId xmlns:a16="http://schemas.microsoft.com/office/drawing/2014/main" id="{A22DE585-9FCE-7436-6662-B9282D604BC9}"/>
+              </a:ext>
+            </a:extLst>
+          </p:cNvPr>
+          <p:cNvPicPr>
+            <a:picLocks noChangeAspect="1"/>
+          </p:cNvPicPr>
+          <p:nvPr/>
+        </p:nvPicPr>
+        <p:blipFill>
+          <a:blip r:embed="rId3">
+            <a:extLst>
+              <a:ext uri="{28A0092B-C50C-407E-A947-70E740481C1C}">
+                <a14:useLocalDpi xmlns:a14="http://schemas.microsoft.com/office/drawing/2010/main" val="0"/>
+              </a:ext>
+            </a:extLst>
+          </a:blip>
+          <a:stretch>
+            <a:fillRect/>
+          </a:stretch>
+        </p:blipFill>
+        <p:spPr>
+          <a:xfrm>
+            <a:off x="10549688" y="4781423"/>
+            <a:ext cx="604636" cy="604636"/>
+          </a:xfrm>
+          <a:prstGeom prst="rect">
+            <a:avLst/>
+          </a:prstGeom>
+        </p:spPr>
+      </p:pic>
+      <p:pic>
+        <p:nvPicPr>
+          <p:cNvPr id="11" name="Picture 10">
+            <a:extLst>
+              <a:ext uri="{FF2B5EF4-FFF2-40B4-BE49-F238E27FC236}">
+                <a16:creationId xmlns:a16="http://schemas.microsoft.com/office/drawing/2014/main" id="{FD96D7DC-9F78-6F33-3E35-26E2016D397B}"/>
+              </a:ext>
+            </a:extLst>
+          </p:cNvPr>
+          <p:cNvPicPr>
+            <a:picLocks noChangeAspect="1"/>
+          </p:cNvPicPr>
+          <p:nvPr/>
+        </p:nvPicPr>
+        <p:blipFill>
+          <a:blip r:embed="rId4">
+            <a:extLst>
+              <a:ext uri="{28A0092B-C50C-407E-A947-70E740481C1C}">
+                <a14:useLocalDpi xmlns:a14="http://schemas.microsoft.com/office/drawing/2010/main" val="0"/>
+              </a:ext>
+            </a:extLst>
+          </a:blip>
+          <a:stretch>
+            <a:fillRect/>
+          </a:stretch>
+        </p:blipFill>
+        <p:spPr>
+          <a:xfrm>
+            <a:off x="9811771" y="4795809"/>
+            <a:ext cx="604636" cy="598983"/>
+          </a:xfrm>
+          <a:prstGeom prst="rect">
+            <a:avLst/>
+          </a:prstGeom>
+        </p:spPr>
+      </p:pic>
+      <p:pic>
+        <p:nvPicPr>
+          <p:cNvPr id="14" name="Picture 13">
+            <a:extLst>
+              <a:ext uri="{FF2B5EF4-FFF2-40B4-BE49-F238E27FC236}">
+                <a16:creationId xmlns:a16="http://schemas.microsoft.com/office/drawing/2014/main" id="{DC5A9262-C799-33B5-E53C-034B398815A4}"/>
+              </a:ext>
+            </a:extLst>
+          </p:cNvPr>
+          <p:cNvPicPr>
+            <a:picLocks noChangeAspect="1"/>
+          </p:cNvPicPr>
+          <p:nvPr/>
+        </p:nvPicPr>
+        <p:blipFill>
+          <a:blip r:embed="rId5">
+            <a:extLst>
+              <a:ext uri="{28A0092B-C50C-407E-A947-70E740481C1C}">
+                <a14:useLocalDpi xmlns:a14="http://schemas.microsoft.com/office/drawing/2010/main" val="0"/>
+              </a:ext>
+            </a:extLst>
+          </a:blip>
+          <a:stretch>
+            <a:fillRect/>
+          </a:stretch>
+        </p:blipFill>
+        <p:spPr>
+          <a:xfrm>
+            <a:off x="9073854" y="4781423"/>
+            <a:ext cx="604636" cy="614684"/>
+          </a:xfrm>
+          <a:prstGeom prst="rect">
+            <a:avLst/>
+          </a:prstGeom>
+        </p:spPr>
+      </p:pic>
+      <p:pic>
+        <p:nvPicPr>
+          <p:cNvPr id="17" name="Picture 16">
+            <a:extLst>
+              <a:ext uri="{FF2B5EF4-FFF2-40B4-BE49-F238E27FC236}">
+                <a16:creationId xmlns:a16="http://schemas.microsoft.com/office/drawing/2014/main" id="{3DA821B4-2B62-61B5-5FFE-BA620D59D5B0}"/>
+              </a:ext>
+            </a:extLst>
+          </p:cNvPr>
+          <p:cNvPicPr>
+            <a:picLocks noChangeAspect="1"/>
+          </p:cNvPicPr>
+          <p:nvPr/>
+        </p:nvPicPr>
+        <p:blipFill>
+          <a:blip r:embed="rId6">
+            <a:extLst>
+              <a:ext uri="{28A0092B-C50C-407E-A947-70E740481C1C}">
+                <a14:useLocalDpi xmlns:a14="http://schemas.microsoft.com/office/drawing/2010/main" val="0"/>
+              </a:ext>
+            </a:extLst>
+          </a:blip>
+          <a:stretch>
+            <a:fillRect/>
+          </a:stretch>
+        </p:blipFill>
+        <p:spPr>
+          <a:xfrm>
+            <a:off x="8268693" y="4791470"/>
+            <a:ext cx="604636" cy="604636"/>
+          </a:xfrm>
+          <a:prstGeom prst="rect">
+            <a:avLst/>
+          </a:prstGeom>
+        </p:spPr>
+      </p:pic>
+      <p:pic>
+        <p:nvPicPr>
+          <p:cNvPr id="19" name="Picture 18">
+            <a:extLst>
+              <a:ext uri="{FF2B5EF4-FFF2-40B4-BE49-F238E27FC236}">
+                <a16:creationId xmlns:a16="http://schemas.microsoft.com/office/drawing/2014/main" id="{B78D1CBC-7BF3-09AC-5BC9-EF7B2E716D22}"/>
+              </a:ext>
+            </a:extLst>
+          </p:cNvPr>
+          <p:cNvPicPr>
+            <a:picLocks noChangeAspect="1"/>
+          </p:cNvPicPr>
+          <p:nvPr/>
+        </p:nvPicPr>
+        <p:blipFill>
+          <a:blip r:embed="rId7"/>
+          <a:stretch>
+            <a:fillRect/>
+          </a:stretch>
+        </p:blipFill>
+        <p:spPr>
+          <a:xfrm>
+            <a:off x="8352589" y="4915175"/>
+            <a:ext cx="380349" cy="380349"/>
+          </a:xfrm>
+          <a:prstGeom prst="rect">
+            <a:avLst/>
+          </a:prstGeom>
+        </p:spPr>
+      </p:pic>
+      <p:pic>
+        <p:nvPicPr>
+          <p:cNvPr id="21" name="Picture 20">
+            <a:extLst>
+              <a:ext uri="{FF2B5EF4-FFF2-40B4-BE49-F238E27FC236}">
+                <a16:creationId xmlns:a16="http://schemas.microsoft.com/office/drawing/2014/main" id="{E9EE09F8-3EDC-ABF0-2599-40B6EC725350}"/>
+              </a:ext>
+            </a:extLst>
+          </p:cNvPr>
+          <p:cNvPicPr>
+            <a:picLocks noChangeAspect="1"/>
+          </p:cNvPicPr>
+          <p:nvPr/>
+        </p:nvPicPr>
+        <p:blipFill>
+          <a:blip r:embed="rId8"/>
+          <a:stretch>
+            <a:fillRect/>
+          </a:stretch>
+        </p:blipFill>
+        <p:spPr>
+          <a:xfrm>
+            <a:off x="9130313" y="4890948"/>
+            <a:ext cx="491717" cy="395634"/>
+          </a:xfrm>
+          <a:prstGeom prst="rect">
+            <a:avLst/>
+          </a:prstGeom>
+        </p:spPr>
+      </p:pic>
+      <p:pic>
+        <p:nvPicPr>
+          <p:cNvPr id="23" name="Picture 22">
+            <a:extLst>
+              <a:ext uri="{FF2B5EF4-FFF2-40B4-BE49-F238E27FC236}">
+                <a16:creationId xmlns:a16="http://schemas.microsoft.com/office/drawing/2014/main" id="{ADB5E090-62B6-FEAC-3BE0-A93F9BE72243}"/>
+              </a:ext>
+            </a:extLst>
+          </p:cNvPr>
+          <p:cNvPicPr>
+            <a:picLocks noChangeAspect="1"/>
+          </p:cNvPicPr>
+          <p:nvPr/>
+        </p:nvPicPr>
+        <p:blipFill>
+          <a:blip r:embed="rId9"/>
+          <a:stretch>
+            <a:fillRect/>
+          </a:stretch>
+        </p:blipFill>
+        <p:spPr>
+          <a:xfrm>
+            <a:off x="9843531" y="4913360"/>
+            <a:ext cx="548177" cy="340759"/>
+          </a:xfrm>
+          <a:prstGeom prst="rect">
+            <a:avLst/>
+          </a:prstGeom>
+        </p:spPr>
+      </p:pic>
+      <p:pic>
+        <p:nvPicPr>
+          <p:cNvPr id="25" name="Picture 24">
+            <a:extLst>
+              <a:ext uri="{FF2B5EF4-FFF2-40B4-BE49-F238E27FC236}">
+                <a16:creationId xmlns:a16="http://schemas.microsoft.com/office/drawing/2014/main" id="{4527B481-09C7-28F2-D9AC-EFAF1B273A09}"/>
+              </a:ext>
+            </a:extLst>
+          </p:cNvPr>
+          <p:cNvPicPr>
+            <a:picLocks noChangeAspect="1"/>
+          </p:cNvPicPr>
+          <p:nvPr/>
+        </p:nvPicPr>
+        <p:blipFill>
+          <a:blip r:embed="rId10"/>
+          <a:stretch>
+            <a:fillRect/>
+          </a:stretch>
+        </p:blipFill>
+        <p:spPr>
+          <a:xfrm>
+            <a:off x="10656547" y="4828340"/>
+            <a:ext cx="376544" cy="486370"/>
+          </a:xfrm>
+          <a:prstGeom prst="rect">
+            <a:avLst/>
+          </a:prstGeom>
+        </p:spPr>
+      </p:pic>
     </p:spTree>
     <p:extLst>
       <p:ext uri="{BB962C8B-B14F-4D97-AF65-F5344CB8AC3E}">
@@ -6388,6 +9141,42 @@
           <a:chExt cx="0" cy="0"/>
         </a:xfrm>
       </p:grpSpPr>
+      <p:pic>
+        <p:nvPicPr>
+          <p:cNvPr id="4" name="Picture 3">
+            <a:extLst>
+              <a:ext uri="{FF2B5EF4-FFF2-40B4-BE49-F238E27FC236}">
+                <a16:creationId xmlns:a16="http://schemas.microsoft.com/office/drawing/2014/main" id="{FB430E08-7C59-935E-3B62-12513310D011}"/>
+              </a:ext>
+            </a:extLst>
+          </p:cNvPr>
+          <p:cNvPicPr>
+            <a:picLocks noChangeAspect="1"/>
+          </p:cNvPicPr>
+          <p:nvPr/>
+        </p:nvPicPr>
+        <p:blipFill>
+          <a:blip r:embed="rId2">
+            <a:extLst>
+              <a:ext uri="{28A0092B-C50C-407E-A947-70E740481C1C}">
+                <a14:useLocalDpi xmlns:a14="http://schemas.microsoft.com/office/drawing/2010/main" val="0"/>
+              </a:ext>
+            </a:extLst>
+          </a:blip>
+          <a:stretch>
+            <a:fillRect/>
+          </a:stretch>
+        </p:blipFill>
+        <p:spPr>
+          <a:xfrm>
+            <a:off x="0" y="1371589"/>
+            <a:ext cx="7315215" cy="5486411"/>
+          </a:xfrm>
+          <a:prstGeom prst="rect">
+            <a:avLst/>
+          </a:prstGeom>
+        </p:spPr>
+      </p:pic>
       <p:sp>
         <p:nvSpPr>
           <p:cNvPr id="2" name="Title 1">
@@ -6416,42 +9205,6 @@
           </a:p>
         </p:txBody>
       </p:sp>
-      <p:pic>
-        <p:nvPicPr>
-          <p:cNvPr id="5" name="Picture 4">
-            <a:extLst>
-              <a:ext uri="{FF2B5EF4-FFF2-40B4-BE49-F238E27FC236}">
-                <a16:creationId xmlns:a16="http://schemas.microsoft.com/office/drawing/2014/main" id="{8F3749C6-B251-8808-A9BC-D2345914EE9C}"/>
-              </a:ext>
-            </a:extLst>
-          </p:cNvPr>
-          <p:cNvPicPr>
-            <a:picLocks noChangeAspect="1"/>
-          </p:cNvPicPr>
-          <p:nvPr/>
-        </p:nvPicPr>
-        <p:blipFill>
-          <a:blip r:embed="rId2">
-            <a:extLst>
-              <a:ext uri="{28A0092B-C50C-407E-A947-70E740481C1C}">
-                <a14:useLocalDpi xmlns:a14="http://schemas.microsoft.com/office/drawing/2010/main" val="0"/>
-              </a:ext>
-            </a:extLst>
-          </a:blip>
-          <a:stretch>
-            <a:fillRect/>
-          </a:stretch>
-        </p:blipFill>
-        <p:spPr>
-          <a:xfrm>
-            <a:off x="0" y="1329802"/>
-            <a:ext cx="7315215" cy="5486411"/>
-          </a:xfrm>
-          <a:prstGeom prst="rect">
-            <a:avLst/>
-          </a:prstGeom>
-        </p:spPr>
-      </p:pic>
       <p:sp>
         <p:nvSpPr>
           <p:cNvPr id="7" name="TextBox 6">
@@ -6466,7 +9219,7 @@
         </p:nvSpPr>
         <p:spPr>
           <a:xfrm>
-            <a:off x="6941574" y="5792260"/>
+            <a:off x="7332151" y="5256829"/>
             <a:ext cx="6096000" cy="769441"/>
           </a:xfrm>
           <a:prstGeom prst="rect">
@@ -6488,104 +9241,270 @@
           </a:p>
         </p:txBody>
       </p:sp>
-      <p:sp>
-        <p:nvSpPr>
-          <p:cNvPr id="9" name="TextBox 8">
-            <a:extLst>
-              <a:ext uri="{FF2B5EF4-FFF2-40B4-BE49-F238E27FC236}">
-                <a16:creationId xmlns:a16="http://schemas.microsoft.com/office/drawing/2014/main" id="{1E8FB9BF-27DC-AF70-2A11-5B1FAF239834}"/>
-              </a:ext>
-            </a:extLst>
-          </p:cNvPr>
-          <p:cNvSpPr txBox="1"/>
-          <p:nvPr/>
-        </p:nvSpPr>
-        <p:spPr>
-          <a:xfrm>
-            <a:off x="7180014" y="1421182"/>
-            <a:ext cx="6096000" cy="954107"/>
-          </a:xfrm>
-          <a:prstGeom prst="rect">
-            <a:avLst/>
-          </a:prstGeom>
-          <a:noFill/>
-        </p:spPr>
-        <p:txBody>
-          <a:bodyPr wrap="square">
-            <a:spAutoFit/>
-          </a:bodyPr>
-          <a:lstStyle/>
-          <a:p>
-            <a:r>
-              <a:rPr lang="en-AU" sz="2800" dirty="0"/>
-              <a:t>Not only high in </a:t>
-            </a:r>
-            <a:r>
-              <a:rPr lang="en-AU" sz="2800" dirty="0" err="1"/>
-              <a:t>tet</a:t>
-            </a:r>
-            <a:r>
-              <a:rPr lang="en-AU" sz="2800" dirty="0"/>
-              <a:t>+ responses, </a:t>
-            </a:r>
-          </a:p>
-          <a:p>
-            <a:r>
-              <a:rPr lang="en-AU" sz="2800" dirty="0"/>
-              <a:t>TM is also high in %effector</a:t>
-            </a:r>
-          </a:p>
-        </p:txBody>
-      </p:sp>
-      <p:sp>
-        <p:nvSpPr>
-          <p:cNvPr id="11" name="TextBox 10">
-            <a:extLst>
-              <a:ext uri="{FF2B5EF4-FFF2-40B4-BE49-F238E27FC236}">
-                <a16:creationId xmlns:a16="http://schemas.microsoft.com/office/drawing/2014/main" id="{C2AF1F21-0CD6-D293-9432-D57F6610A598}"/>
-              </a:ext>
-            </a:extLst>
-          </p:cNvPr>
-          <p:cNvSpPr txBox="1"/>
-          <p:nvPr/>
-        </p:nvSpPr>
-        <p:spPr>
-          <a:xfrm>
-            <a:off x="7374208" y="2583669"/>
-            <a:ext cx="6096000" cy="954107"/>
-          </a:xfrm>
-          <a:prstGeom prst="rect">
-            <a:avLst/>
-          </a:prstGeom>
-          <a:noFill/>
-        </p:spPr>
-        <p:txBody>
-          <a:bodyPr wrap="square">
-            <a:spAutoFit/>
-          </a:bodyPr>
-          <a:lstStyle/>
-          <a:p>
-            <a:r>
-              <a:rPr lang="en-AU" sz="2800" dirty="0"/>
-              <a:t>IC is lowest </a:t>
-            </a:r>
-            <a:r>
-              <a:rPr lang="en-AU" sz="2800" dirty="0" err="1"/>
-              <a:t>tet</a:t>
-            </a:r>
-            <a:r>
-              <a:rPr lang="en-AU" sz="2800" dirty="0"/>
-              <a:t>+ response, </a:t>
-            </a:r>
-          </a:p>
-          <a:p>
-            <a:r>
-              <a:rPr lang="en-AU" sz="2800" dirty="0"/>
-              <a:t>and lowest %effector</a:t>
-            </a:r>
-          </a:p>
-        </p:txBody>
-      </p:sp>
+      <p:pic>
+        <p:nvPicPr>
+          <p:cNvPr id="14" name="Picture 13">
+            <a:extLst>
+              <a:ext uri="{FF2B5EF4-FFF2-40B4-BE49-F238E27FC236}">
+                <a16:creationId xmlns:a16="http://schemas.microsoft.com/office/drawing/2014/main" id="{EF1FE8D4-E4F1-3636-66C5-AE5B149E63C9}"/>
+              </a:ext>
+            </a:extLst>
+          </p:cNvPr>
+          <p:cNvPicPr>
+            <a:picLocks noChangeAspect="1"/>
+          </p:cNvPicPr>
+          <p:nvPr/>
+        </p:nvPicPr>
+        <p:blipFill>
+          <a:blip r:embed="rId3">
+            <a:extLst>
+              <a:ext uri="{28A0092B-C50C-407E-A947-70E740481C1C}">
+                <a14:useLocalDpi xmlns:a14="http://schemas.microsoft.com/office/drawing/2010/main" val="0"/>
+              </a:ext>
+            </a:extLst>
+          </a:blip>
+          <a:stretch>
+            <a:fillRect/>
+          </a:stretch>
+        </p:blipFill>
+        <p:spPr>
+          <a:xfrm>
+            <a:off x="11379444" y="3937688"/>
+            <a:ext cx="648826" cy="592339"/>
+          </a:xfrm>
+          <a:prstGeom prst="rect">
+            <a:avLst/>
+          </a:prstGeom>
+        </p:spPr>
+      </p:pic>
+      <p:pic>
+        <p:nvPicPr>
+          <p:cNvPr id="16" name="Picture 15">
+            <a:extLst>
+              <a:ext uri="{FF2B5EF4-FFF2-40B4-BE49-F238E27FC236}">
+                <a16:creationId xmlns:a16="http://schemas.microsoft.com/office/drawing/2014/main" id="{87A9BA01-D5FA-AFBB-906E-E24FE2FF462D}"/>
+              </a:ext>
+            </a:extLst>
+          </p:cNvPr>
+          <p:cNvPicPr>
+            <a:picLocks noChangeAspect="1"/>
+          </p:cNvPicPr>
+          <p:nvPr/>
+        </p:nvPicPr>
+        <p:blipFill>
+          <a:blip r:embed="rId4">
+            <a:extLst>
+              <a:ext uri="{28A0092B-C50C-407E-A947-70E740481C1C}">
+                <a14:useLocalDpi xmlns:a14="http://schemas.microsoft.com/office/drawing/2010/main" val="0"/>
+              </a:ext>
+            </a:extLst>
+          </a:blip>
+          <a:stretch>
+            <a:fillRect/>
+          </a:stretch>
+        </p:blipFill>
+        <p:spPr>
+          <a:xfrm>
+            <a:off x="10454353" y="3926929"/>
+            <a:ext cx="828348" cy="818057"/>
+          </a:xfrm>
+          <a:prstGeom prst="rect">
+            <a:avLst/>
+          </a:prstGeom>
+        </p:spPr>
+      </p:pic>
+      <p:pic>
+        <p:nvPicPr>
+          <p:cNvPr id="18" name="Picture 17">
+            <a:extLst>
+              <a:ext uri="{FF2B5EF4-FFF2-40B4-BE49-F238E27FC236}">
+                <a16:creationId xmlns:a16="http://schemas.microsoft.com/office/drawing/2014/main" id="{954EED18-27D2-E548-A649-5E60FD8865A3}"/>
+              </a:ext>
+            </a:extLst>
+          </p:cNvPr>
+          <p:cNvPicPr>
+            <a:picLocks noChangeAspect="1"/>
+          </p:cNvPicPr>
+          <p:nvPr/>
+        </p:nvPicPr>
+        <p:blipFill>
+          <a:blip r:embed="rId5">
+            <a:extLst>
+              <a:ext uri="{28A0092B-C50C-407E-A947-70E740481C1C}">
+                <a14:useLocalDpi xmlns:a14="http://schemas.microsoft.com/office/drawing/2010/main" val="0"/>
+              </a:ext>
+            </a:extLst>
+          </a:blip>
+          <a:stretch>
+            <a:fillRect/>
+          </a:stretch>
+        </p:blipFill>
+        <p:spPr>
+          <a:xfrm>
+            <a:off x="9221224" y="3926929"/>
+            <a:ext cx="1068254" cy="1040233"/>
+          </a:xfrm>
+          <a:prstGeom prst="rect">
+            <a:avLst/>
+          </a:prstGeom>
+        </p:spPr>
+      </p:pic>
+      <p:pic>
+        <p:nvPicPr>
+          <p:cNvPr id="20" name="Picture 19">
+            <a:extLst>
+              <a:ext uri="{FF2B5EF4-FFF2-40B4-BE49-F238E27FC236}">
+                <a16:creationId xmlns:a16="http://schemas.microsoft.com/office/drawing/2014/main" id="{5CD307AF-F506-35B1-EABC-AEA05A9DA9C5}"/>
+              </a:ext>
+            </a:extLst>
+          </p:cNvPr>
+          <p:cNvPicPr>
+            <a:picLocks noChangeAspect="1"/>
+          </p:cNvPicPr>
+          <p:nvPr/>
+        </p:nvPicPr>
+        <p:blipFill>
+          <a:blip r:embed="rId6">
+            <a:extLst>
+              <a:ext uri="{28A0092B-C50C-407E-A947-70E740481C1C}">
+                <a14:useLocalDpi xmlns:a14="http://schemas.microsoft.com/office/drawing/2010/main" val="0"/>
+              </a:ext>
+            </a:extLst>
+          </a:blip>
+          <a:stretch>
+            <a:fillRect/>
+          </a:stretch>
+        </p:blipFill>
+        <p:spPr>
+          <a:xfrm>
+            <a:off x="7723590" y="3926929"/>
+            <a:ext cx="1362952" cy="1362952"/>
+          </a:xfrm>
+          <a:prstGeom prst="rect">
+            <a:avLst/>
+          </a:prstGeom>
+        </p:spPr>
+      </p:pic>
+      <p:pic>
+        <p:nvPicPr>
+          <p:cNvPr id="22" name="Picture 21">
+            <a:extLst>
+              <a:ext uri="{FF2B5EF4-FFF2-40B4-BE49-F238E27FC236}">
+                <a16:creationId xmlns:a16="http://schemas.microsoft.com/office/drawing/2014/main" id="{18E0B9DC-4D50-BD0A-74D7-766F1A94AEF3}"/>
+              </a:ext>
+            </a:extLst>
+          </p:cNvPr>
+          <p:cNvPicPr>
+            <a:picLocks noChangeAspect="1"/>
+          </p:cNvPicPr>
+          <p:nvPr/>
+        </p:nvPicPr>
+        <p:blipFill>
+          <a:blip r:embed="rId7"/>
+          <a:stretch>
+            <a:fillRect/>
+          </a:stretch>
+        </p:blipFill>
+        <p:spPr>
+          <a:xfrm>
+            <a:off x="7949606" y="4163194"/>
+            <a:ext cx="857370" cy="857370"/>
+          </a:xfrm>
+          <a:prstGeom prst="rect">
+            <a:avLst/>
+          </a:prstGeom>
+        </p:spPr>
+      </p:pic>
+      <p:pic>
+        <p:nvPicPr>
+          <p:cNvPr id="24" name="Picture 23">
+            <a:extLst>
+              <a:ext uri="{FF2B5EF4-FFF2-40B4-BE49-F238E27FC236}">
+                <a16:creationId xmlns:a16="http://schemas.microsoft.com/office/drawing/2014/main" id="{3EC5763F-2286-792F-E159-7F4C23457B16}"/>
+              </a:ext>
+            </a:extLst>
+          </p:cNvPr>
+          <p:cNvPicPr>
+            <a:picLocks noChangeAspect="1"/>
+          </p:cNvPicPr>
+          <p:nvPr/>
+        </p:nvPicPr>
+        <p:blipFill>
+          <a:blip r:embed="rId8"/>
+          <a:stretch>
+            <a:fillRect/>
+          </a:stretch>
+        </p:blipFill>
+        <p:spPr>
+          <a:xfrm>
+            <a:off x="9325528" y="4115391"/>
+            <a:ext cx="796764" cy="629595"/>
+          </a:xfrm>
+          <a:prstGeom prst="rect">
+            <a:avLst/>
+          </a:prstGeom>
+        </p:spPr>
+      </p:pic>
+      <p:pic>
+        <p:nvPicPr>
+          <p:cNvPr id="26" name="Picture 25">
+            <a:extLst>
+              <a:ext uri="{FF2B5EF4-FFF2-40B4-BE49-F238E27FC236}">
+                <a16:creationId xmlns:a16="http://schemas.microsoft.com/office/drawing/2014/main" id="{37C011E4-C25D-6B1D-C49C-292889D3E4B5}"/>
+              </a:ext>
+            </a:extLst>
+          </p:cNvPr>
+          <p:cNvPicPr>
+            <a:picLocks noChangeAspect="1"/>
+          </p:cNvPicPr>
+          <p:nvPr/>
+        </p:nvPicPr>
+        <p:blipFill>
+          <a:blip r:embed="rId9"/>
+          <a:stretch>
+            <a:fillRect/>
+          </a:stretch>
+        </p:blipFill>
+        <p:spPr>
+          <a:xfrm>
+            <a:off x="10528094" y="4062104"/>
+            <a:ext cx="711581" cy="537961"/>
+          </a:xfrm>
+          <a:prstGeom prst="rect">
+            <a:avLst/>
+          </a:prstGeom>
+        </p:spPr>
+      </p:pic>
+      <p:pic>
+        <p:nvPicPr>
+          <p:cNvPr id="28" name="Picture 27">
+            <a:extLst>
+              <a:ext uri="{FF2B5EF4-FFF2-40B4-BE49-F238E27FC236}">
+                <a16:creationId xmlns:a16="http://schemas.microsoft.com/office/drawing/2014/main" id="{A1984974-FD66-6D94-AD22-C1F7CFB1BD69}"/>
+              </a:ext>
+            </a:extLst>
+          </p:cNvPr>
+          <p:cNvPicPr>
+            <a:picLocks noChangeAspect="1"/>
+          </p:cNvPicPr>
+          <p:nvPr/>
+        </p:nvPicPr>
+        <p:blipFill>
+          <a:blip r:embed="rId10"/>
+          <a:stretch>
+            <a:fillRect/>
+          </a:stretch>
+        </p:blipFill>
+        <p:spPr>
+          <a:xfrm>
+            <a:off x="11447576" y="3978174"/>
+            <a:ext cx="516436" cy="489679"/>
+          </a:xfrm>
+          <a:prstGeom prst="rect">
+            <a:avLst/>
+          </a:prstGeom>
+        </p:spPr>
+      </p:pic>
     </p:spTree>
     <p:extLst>
       <p:ext uri="{BB962C8B-B14F-4D97-AF65-F5344CB8AC3E}">
@@ -6624,10 +9543,10 @@
       </p:grpSpPr>
       <p:pic>
         <p:nvPicPr>
-          <p:cNvPr id="8" name="Picture 7">
-            <a:extLst>
-              <a:ext uri="{FF2B5EF4-FFF2-40B4-BE49-F238E27FC236}">
-                <a16:creationId xmlns:a16="http://schemas.microsoft.com/office/drawing/2014/main" id="{D2C8423A-4418-CAA2-F0D6-44D4039E815C}"/>
+          <p:cNvPr id="4" name="Picture 3">
+            <a:extLst>
+              <a:ext uri="{FF2B5EF4-FFF2-40B4-BE49-F238E27FC236}">
+                <a16:creationId xmlns:a16="http://schemas.microsoft.com/office/drawing/2014/main" id="{81758A14-ED6B-A810-9B56-AFE4D4D0561C}"/>
               </a:ext>
             </a:extLst>
           </p:cNvPr>
@@ -6650,7 +9569,7 @@
         </p:blipFill>
         <p:spPr>
           <a:xfrm>
-            <a:off x="49161" y="1371589"/>
+            <a:off x="0" y="1371589"/>
             <a:ext cx="7315215" cy="5486411"/>
           </a:xfrm>
           <a:prstGeom prst="rect">
@@ -6688,10 +9607,10 @@
       </p:sp>
       <p:sp>
         <p:nvSpPr>
-          <p:cNvPr id="7" name="TextBox 6">
-            <a:extLst>
-              <a:ext uri="{FF2B5EF4-FFF2-40B4-BE49-F238E27FC236}">
-                <a16:creationId xmlns:a16="http://schemas.microsoft.com/office/drawing/2014/main" id="{C198F0BD-3CE0-287E-40AA-F028DD9CF1C6}"/>
+          <p:cNvPr id="10" name="TextBox 9">
+            <a:extLst>
+              <a:ext uri="{FF2B5EF4-FFF2-40B4-BE49-F238E27FC236}">
+                <a16:creationId xmlns:a16="http://schemas.microsoft.com/office/drawing/2014/main" id="{586709AA-8571-67AC-39E5-7B9A0FA5DBB3}"/>
               </a:ext>
             </a:extLst>
           </p:cNvPr>
@@ -6700,7 +9619,7 @@
         </p:nvSpPr>
         <p:spPr>
           <a:xfrm>
-            <a:off x="6941574" y="5792260"/>
+            <a:off x="7315215" y="5221808"/>
             <a:ext cx="6096000" cy="769441"/>
           </a:xfrm>
           <a:prstGeom prst="rect">
@@ -6722,6 +9641,270 @@
           </a:p>
         </p:txBody>
       </p:sp>
+      <p:pic>
+        <p:nvPicPr>
+          <p:cNvPr id="12" name="Picture 11">
+            <a:extLst>
+              <a:ext uri="{FF2B5EF4-FFF2-40B4-BE49-F238E27FC236}">
+                <a16:creationId xmlns:a16="http://schemas.microsoft.com/office/drawing/2014/main" id="{34740A3B-526A-F7F9-6E69-BA8BA3BF4C5B}"/>
+              </a:ext>
+            </a:extLst>
+          </p:cNvPr>
+          <p:cNvPicPr>
+            <a:picLocks noChangeAspect="1"/>
+          </p:cNvPicPr>
+          <p:nvPr/>
+        </p:nvPicPr>
+        <p:blipFill>
+          <a:blip r:embed="rId3">
+            <a:extLst>
+              <a:ext uri="{28A0092B-C50C-407E-A947-70E740481C1C}">
+                <a14:useLocalDpi xmlns:a14="http://schemas.microsoft.com/office/drawing/2010/main" val="0"/>
+              </a:ext>
+            </a:extLst>
+          </a:blip>
+          <a:stretch>
+            <a:fillRect/>
+          </a:stretch>
+        </p:blipFill>
+        <p:spPr>
+          <a:xfrm>
+            <a:off x="11333724" y="3937688"/>
+            <a:ext cx="648826" cy="592339"/>
+          </a:xfrm>
+          <a:prstGeom prst="rect">
+            <a:avLst/>
+          </a:prstGeom>
+        </p:spPr>
+      </p:pic>
+      <p:pic>
+        <p:nvPicPr>
+          <p:cNvPr id="14" name="Picture 13">
+            <a:extLst>
+              <a:ext uri="{FF2B5EF4-FFF2-40B4-BE49-F238E27FC236}">
+                <a16:creationId xmlns:a16="http://schemas.microsoft.com/office/drawing/2014/main" id="{B7A3336C-62D8-36D8-5EF3-F919DD29E22B}"/>
+              </a:ext>
+            </a:extLst>
+          </p:cNvPr>
+          <p:cNvPicPr>
+            <a:picLocks noChangeAspect="1"/>
+          </p:cNvPicPr>
+          <p:nvPr/>
+        </p:nvPicPr>
+        <p:blipFill>
+          <a:blip r:embed="rId4">
+            <a:extLst>
+              <a:ext uri="{28A0092B-C50C-407E-A947-70E740481C1C}">
+                <a14:useLocalDpi xmlns:a14="http://schemas.microsoft.com/office/drawing/2010/main" val="0"/>
+              </a:ext>
+            </a:extLst>
+          </a:blip>
+          <a:stretch>
+            <a:fillRect/>
+          </a:stretch>
+        </p:blipFill>
+        <p:spPr>
+          <a:xfrm>
+            <a:off x="10408633" y="3926929"/>
+            <a:ext cx="828348" cy="818057"/>
+          </a:xfrm>
+          <a:prstGeom prst="rect">
+            <a:avLst/>
+          </a:prstGeom>
+        </p:spPr>
+      </p:pic>
+      <p:pic>
+        <p:nvPicPr>
+          <p:cNvPr id="16" name="Picture 15">
+            <a:extLst>
+              <a:ext uri="{FF2B5EF4-FFF2-40B4-BE49-F238E27FC236}">
+                <a16:creationId xmlns:a16="http://schemas.microsoft.com/office/drawing/2014/main" id="{5B851085-9491-BC92-A982-AAEB3F8D5621}"/>
+              </a:ext>
+            </a:extLst>
+          </p:cNvPr>
+          <p:cNvPicPr>
+            <a:picLocks noChangeAspect="1"/>
+          </p:cNvPicPr>
+          <p:nvPr/>
+        </p:nvPicPr>
+        <p:blipFill>
+          <a:blip r:embed="rId5">
+            <a:extLst>
+              <a:ext uri="{28A0092B-C50C-407E-A947-70E740481C1C}">
+                <a14:useLocalDpi xmlns:a14="http://schemas.microsoft.com/office/drawing/2010/main" val="0"/>
+              </a:ext>
+            </a:extLst>
+          </a:blip>
+          <a:stretch>
+            <a:fillRect/>
+          </a:stretch>
+        </p:blipFill>
+        <p:spPr>
+          <a:xfrm>
+            <a:off x="9175504" y="3926929"/>
+            <a:ext cx="1068254" cy="1040233"/>
+          </a:xfrm>
+          <a:prstGeom prst="rect">
+            <a:avLst/>
+          </a:prstGeom>
+        </p:spPr>
+      </p:pic>
+      <p:pic>
+        <p:nvPicPr>
+          <p:cNvPr id="18" name="Picture 17">
+            <a:extLst>
+              <a:ext uri="{FF2B5EF4-FFF2-40B4-BE49-F238E27FC236}">
+                <a16:creationId xmlns:a16="http://schemas.microsoft.com/office/drawing/2014/main" id="{C58BF39A-C3A5-C526-EF0B-1ED5C6D5E9C4}"/>
+              </a:ext>
+            </a:extLst>
+          </p:cNvPr>
+          <p:cNvPicPr>
+            <a:picLocks noChangeAspect="1"/>
+          </p:cNvPicPr>
+          <p:nvPr/>
+        </p:nvPicPr>
+        <p:blipFill>
+          <a:blip r:embed="rId6">
+            <a:extLst>
+              <a:ext uri="{28A0092B-C50C-407E-A947-70E740481C1C}">
+                <a14:useLocalDpi xmlns:a14="http://schemas.microsoft.com/office/drawing/2010/main" val="0"/>
+              </a:ext>
+            </a:extLst>
+          </a:blip>
+          <a:stretch>
+            <a:fillRect/>
+          </a:stretch>
+        </p:blipFill>
+        <p:spPr>
+          <a:xfrm>
+            <a:off x="7677870" y="3926929"/>
+            <a:ext cx="1362952" cy="1362952"/>
+          </a:xfrm>
+          <a:prstGeom prst="rect">
+            <a:avLst/>
+          </a:prstGeom>
+        </p:spPr>
+      </p:pic>
+      <p:pic>
+        <p:nvPicPr>
+          <p:cNvPr id="20" name="Picture 19">
+            <a:extLst>
+              <a:ext uri="{FF2B5EF4-FFF2-40B4-BE49-F238E27FC236}">
+                <a16:creationId xmlns:a16="http://schemas.microsoft.com/office/drawing/2014/main" id="{5B8AF6E1-66CE-5858-46A3-C0C8FA8CAE3F}"/>
+              </a:ext>
+            </a:extLst>
+          </p:cNvPr>
+          <p:cNvPicPr>
+            <a:picLocks noChangeAspect="1"/>
+          </p:cNvPicPr>
+          <p:nvPr/>
+        </p:nvPicPr>
+        <p:blipFill>
+          <a:blip r:embed="rId7"/>
+          <a:stretch>
+            <a:fillRect/>
+          </a:stretch>
+        </p:blipFill>
+        <p:spPr>
+          <a:xfrm>
+            <a:off x="7903886" y="4163194"/>
+            <a:ext cx="857370" cy="857370"/>
+          </a:xfrm>
+          <a:prstGeom prst="rect">
+            <a:avLst/>
+          </a:prstGeom>
+        </p:spPr>
+      </p:pic>
+      <p:pic>
+        <p:nvPicPr>
+          <p:cNvPr id="22" name="Picture 21">
+            <a:extLst>
+              <a:ext uri="{FF2B5EF4-FFF2-40B4-BE49-F238E27FC236}">
+                <a16:creationId xmlns:a16="http://schemas.microsoft.com/office/drawing/2014/main" id="{C8738D43-6D8C-BEC0-635F-6EAAEC1D8CE5}"/>
+              </a:ext>
+            </a:extLst>
+          </p:cNvPr>
+          <p:cNvPicPr>
+            <a:picLocks noChangeAspect="1"/>
+          </p:cNvPicPr>
+          <p:nvPr/>
+        </p:nvPicPr>
+        <p:blipFill>
+          <a:blip r:embed="rId8"/>
+          <a:stretch>
+            <a:fillRect/>
+          </a:stretch>
+        </p:blipFill>
+        <p:spPr>
+          <a:xfrm>
+            <a:off x="9279808" y="4115391"/>
+            <a:ext cx="796764" cy="629595"/>
+          </a:xfrm>
+          <a:prstGeom prst="rect">
+            <a:avLst/>
+          </a:prstGeom>
+        </p:spPr>
+      </p:pic>
+      <p:pic>
+        <p:nvPicPr>
+          <p:cNvPr id="24" name="Picture 23">
+            <a:extLst>
+              <a:ext uri="{FF2B5EF4-FFF2-40B4-BE49-F238E27FC236}">
+                <a16:creationId xmlns:a16="http://schemas.microsoft.com/office/drawing/2014/main" id="{BFCDB5CB-2DF9-632C-06AB-F33B500977E8}"/>
+              </a:ext>
+            </a:extLst>
+          </p:cNvPr>
+          <p:cNvPicPr>
+            <a:picLocks noChangeAspect="1"/>
+          </p:cNvPicPr>
+          <p:nvPr/>
+        </p:nvPicPr>
+        <p:blipFill>
+          <a:blip r:embed="rId9"/>
+          <a:stretch>
+            <a:fillRect/>
+          </a:stretch>
+        </p:blipFill>
+        <p:spPr>
+          <a:xfrm>
+            <a:off x="10482374" y="4062104"/>
+            <a:ext cx="711581" cy="537961"/>
+          </a:xfrm>
+          <a:prstGeom prst="rect">
+            <a:avLst/>
+          </a:prstGeom>
+        </p:spPr>
+      </p:pic>
+      <p:pic>
+        <p:nvPicPr>
+          <p:cNvPr id="26" name="Picture 25">
+            <a:extLst>
+              <a:ext uri="{FF2B5EF4-FFF2-40B4-BE49-F238E27FC236}">
+                <a16:creationId xmlns:a16="http://schemas.microsoft.com/office/drawing/2014/main" id="{3BC6ACE9-C74B-EB41-F594-7706D3128965}"/>
+              </a:ext>
+            </a:extLst>
+          </p:cNvPr>
+          <p:cNvPicPr>
+            <a:picLocks noChangeAspect="1"/>
+          </p:cNvPicPr>
+          <p:nvPr/>
+        </p:nvPicPr>
+        <p:blipFill>
+          <a:blip r:embed="rId10"/>
+          <a:stretch>
+            <a:fillRect/>
+          </a:stretch>
+        </p:blipFill>
+        <p:spPr>
+          <a:xfrm>
+            <a:off x="11401856" y="3978174"/>
+            <a:ext cx="516436" cy="489679"/>
+          </a:xfrm>
+          <a:prstGeom prst="rect">
+            <a:avLst/>
+          </a:prstGeom>
+        </p:spPr>
+      </p:pic>
     </p:spTree>
     <p:extLst>
       <p:ext uri="{BB962C8B-B14F-4D97-AF65-F5344CB8AC3E}">
